--- a/statistics_02_std_dev_std_err.pptx
+++ b/statistics_02_std_dev_std_err.pptx
@@ -13611,7 +13611,7 @@
         <p:spPr>
           <a:xfrm>
             <a:off x="6826678" y="743712"/>
-            <a:ext cx="5328746" cy="5078313"/>
+            <a:ext cx="5328746" cy="5262979"/>
           </a:xfrm>
           <a:prstGeom prst="rect">
             <a:avLst/>
@@ -13963,7 +13963,7 @@
                 <a:ea typeface="Menlo" panose="020B0609030804020204" pitchFamily="49" charset="0"/>
                 <a:cs typeface="Menlo" panose="020B0609030804020204" pitchFamily="49" charset="0"/>
               </a:rPr>
-              <a:t> = {N}, mean={mean:.4f}")</a:t>
+              <a:t> = {N}, mean={mean:.4f}")  # 3, 2</a:t>
             </a:r>
           </a:p>
           <a:p>
@@ -14192,7 +14192,29 @@
                 <a:ea typeface="Menlo" panose="020B0609030804020204" pitchFamily="49" charset="0"/>
                 <a:cs typeface="Menlo" panose="020B0609030804020204" pitchFamily="49" charset="0"/>
               </a:rPr>
-              <a:t>(ss/</a:t>
+              <a:t>(</a:t>
+            </a:r>
+            <a:r>
+              <a:rPr lang="en-US" sz="1200" dirty="0" err="1">
+                <a:solidFill>
+                  <a:srgbClr val="0070C0"/>
+                </a:solidFill>
+                <a:latin typeface="Menlo" panose="020B0609030804020204" pitchFamily="49" charset="0"/>
+                <a:ea typeface="Menlo" panose="020B0609030804020204" pitchFamily="49" charset="0"/>
+                <a:cs typeface="Menlo" panose="020B0609030804020204" pitchFamily="49" charset="0"/>
+              </a:rPr>
+              <a:t>mysum</a:t>
+            </a:r>
+            <a:r>
+              <a:rPr lang="en-US" sz="1200" dirty="0">
+                <a:solidFill>
+                  <a:srgbClr val="0070C0"/>
+                </a:solidFill>
+                <a:latin typeface="Menlo" panose="020B0609030804020204" pitchFamily="49" charset="0"/>
+                <a:ea typeface="Menlo" panose="020B0609030804020204" pitchFamily="49" charset="0"/>
+                <a:cs typeface="Menlo" panose="020B0609030804020204" pitchFamily="49" charset="0"/>
+              </a:rPr>
+              <a:t>/</a:t>
             </a:r>
             <a:r>
               <a:rPr lang="en-US" sz="1200" dirty="0" err="1">
@@ -14214,7 +14236,7 @@
                 <a:ea typeface="Menlo" panose="020B0609030804020204" pitchFamily="49" charset="0"/>
                 <a:cs typeface="Menlo" panose="020B0609030804020204" pitchFamily="49" charset="0"/>
               </a:rPr>
-              <a:t>)        </a:t>
+              <a:t>)     </a:t>
             </a:r>
             <a:r>
               <a:rPr lang="en-US" sz="1200" dirty="0">
@@ -14260,7 +14282,29 @@
                 <a:ea typeface="Menlo" panose="020B0609030804020204" pitchFamily="49" charset="0"/>
                 <a:cs typeface="Menlo" panose="020B0609030804020204" pitchFamily="49" charset="0"/>
               </a:rPr>
-              <a:t>   (d1, </a:t>
+              <a:t>   (</a:t>
+            </a:r>
+            <a:r>
+              <a:rPr lang="en-US" sz="1200" dirty="0" err="1">
+                <a:solidFill>
+                  <a:srgbClr val="0070C0"/>
+                </a:solidFill>
+                <a:latin typeface="Menlo" panose="020B0609030804020204" pitchFamily="49" charset="0"/>
+                <a:ea typeface="Menlo" panose="020B0609030804020204" pitchFamily="49" charset="0"/>
+                <a:cs typeface="Menlo" panose="020B0609030804020204" pitchFamily="49" charset="0"/>
+              </a:rPr>
+              <a:t>arr</a:t>
+            </a:r>
+            <a:r>
+              <a:rPr lang="en-US" sz="1200" dirty="0">
+                <a:solidFill>
+                  <a:srgbClr val="0070C0"/>
+                </a:solidFill>
+                <a:latin typeface="Menlo" panose="020B0609030804020204" pitchFamily="49" charset="0"/>
+                <a:ea typeface="Menlo" panose="020B0609030804020204" pitchFamily="49" charset="0"/>
+                <a:cs typeface="Menlo" panose="020B0609030804020204" pitchFamily="49" charset="0"/>
+              </a:rPr>
+              <a:t>, </a:t>
             </a:r>
             <a:r>
               <a:rPr lang="en-US" sz="1200" dirty="0" err="1">
@@ -14381,7 +14425,29 @@
                 <a:ea typeface="Menlo" panose="020B0609030804020204" pitchFamily="49" charset="0"/>
                 <a:cs typeface="Menlo" panose="020B0609030804020204" pitchFamily="49" charset="0"/>
               </a:rPr>
-              <a:t>(d1, </a:t>
+              <a:t>(</a:t>
+            </a:r>
+            <a:r>
+              <a:rPr lang="en-US" sz="1200" dirty="0" err="1">
+                <a:solidFill>
+                  <a:srgbClr val="0070C0"/>
+                </a:solidFill>
+                <a:latin typeface="Menlo" panose="020B0609030804020204" pitchFamily="49" charset="0"/>
+                <a:ea typeface="Menlo" panose="020B0609030804020204" pitchFamily="49" charset="0"/>
+                <a:cs typeface="Menlo" panose="020B0609030804020204" pitchFamily="49" charset="0"/>
+              </a:rPr>
+              <a:t>arr</a:t>
+            </a:r>
+            <a:r>
+              <a:rPr lang="en-US" sz="1200" dirty="0">
+                <a:solidFill>
+                  <a:srgbClr val="0070C0"/>
+                </a:solidFill>
+                <a:latin typeface="Menlo" panose="020B0609030804020204" pitchFamily="49" charset="0"/>
+                <a:ea typeface="Menlo" panose="020B0609030804020204" pitchFamily="49" charset="0"/>
+                <a:cs typeface="Menlo" panose="020B0609030804020204" pitchFamily="49" charset="0"/>
+              </a:rPr>
+              <a:t>, </a:t>
             </a:r>
             <a:r>
               <a:rPr lang="en-US" sz="1200" dirty="0" err="1">
@@ -14460,7 +14526,29 @@
                 <a:ea typeface="Menlo" panose="020B0609030804020204" pitchFamily="49" charset="0"/>
                 <a:cs typeface="Menlo" panose="020B0609030804020204" pitchFamily="49" charset="0"/>
               </a:rPr>
-              <a:t>(d1, </a:t>
+              <a:t>(</a:t>
+            </a:r>
+            <a:r>
+              <a:rPr lang="en-US" sz="1200" dirty="0" err="1">
+                <a:solidFill>
+                  <a:srgbClr val="0070C0"/>
+                </a:solidFill>
+                <a:latin typeface="Menlo" panose="020B0609030804020204" pitchFamily="49" charset="0"/>
+                <a:ea typeface="Menlo" panose="020B0609030804020204" pitchFamily="49" charset="0"/>
+                <a:cs typeface="Menlo" panose="020B0609030804020204" pitchFamily="49" charset="0"/>
+              </a:rPr>
+              <a:t>arr</a:t>
+            </a:r>
+            <a:r>
+              <a:rPr lang="en-US" sz="1200" dirty="0">
+                <a:solidFill>
+                  <a:srgbClr val="0070C0"/>
+                </a:solidFill>
+                <a:latin typeface="Menlo" panose="020B0609030804020204" pitchFamily="49" charset="0"/>
+                <a:ea typeface="Menlo" panose="020B0609030804020204" pitchFamily="49" charset="0"/>
+                <a:cs typeface="Menlo" panose="020B0609030804020204" pitchFamily="49" charset="0"/>
+              </a:rPr>
+              <a:t>, </a:t>
             </a:r>
             <a:r>
               <a:rPr lang="en-US" sz="1200" dirty="0" err="1">
@@ -14482,7 +14570,18 @@
                 <a:ea typeface="Menlo" panose="020B0609030804020204" pitchFamily="49" charset="0"/>
                 <a:cs typeface="Menlo" panose="020B0609030804020204" pitchFamily="49" charset="0"/>
               </a:rPr>
-              <a:t>=1)</a:t>
+              <a:t>=1)    </a:t>
+            </a:r>
+            <a:r>
+              <a:rPr lang="en-US" sz="1200" dirty="0">
+                <a:solidFill>
+                  <a:srgbClr val="00B050"/>
+                </a:solidFill>
+                <a:latin typeface="Menlo" panose="020B0609030804020204" pitchFamily="49" charset="0"/>
+                <a:ea typeface="Menlo" panose="020B0609030804020204" pitchFamily="49" charset="0"/>
+                <a:cs typeface="Menlo" panose="020B0609030804020204" pitchFamily="49" charset="0"/>
+              </a:rPr>
+              <a:t># trimmed std</a:t>
             </a:r>
           </a:p>
           <a:p>

--- a/statistics_02_std_dev_std_err.pptx
+++ b/statistics_02_std_dev_std_err.pptx
@@ -5,11 +5,12 @@
     <p:sldMasterId id="2147483659" r:id="rId1"/>
   </p:sldMasterIdLst>
   <p:notesMasterIdLst>
-    <p:notesMasterId r:id="rId4"/>
+    <p:notesMasterId r:id="rId5"/>
   </p:notesMasterIdLst>
   <p:sldIdLst>
     <p:sldId id="269" r:id="rId2"/>
     <p:sldId id="302" r:id="rId3"/>
+    <p:sldId id="256" r:id="rId4"/>
   </p:sldIdLst>
   <p:sldSz cx="12192000" cy="6858000"/>
   <p:notesSz cx="6858000" cy="9144000"/>
@@ -2476,6 +2477,226 @@
 </p:sldLayout>
 </file>
 
+<file path=ppt/slideLayouts/slideLayout10.xml><?xml version="1.0" encoding="utf-8"?>
+<p:sldLayout xmlns:a="http://schemas.openxmlformats.org/drawingml/2006/main" xmlns:r="http://schemas.openxmlformats.org/officeDocument/2006/relationships" xmlns:p="http://schemas.openxmlformats.org/presentationml/2006/main" type="title">
+  <p:cSld name="Title Slide">
+    <p:spTree>
+      <p:nvGrpSpPr>
+        <p:cNvPr id="1" name=""/>
+        <p:cNvGrpSpPr/>
+        <p:nvPr/>
+      </p:nvGrpSpPr>
+      <p:grpSpPr>
+        <a:xfrm>
+          <a:off x="0" y="0"/>
+          <a:ext cx="0" cy="0"/>
+          <a:chOff x="0" y="0"/>
+          <a:chExt cx="0" cy="0"/>
+        </a:xfrm>
+      </p:grpSpPr>
+      <p:sp>
+        <p:nvSpPr>
+          <p:cNvPr id="2" name="Title 1">
+            <a:extLst>
+              <a:ext uri="{FF2B5EF4-FFF2-40B4-BE49-F238E27FC236}">
+                <a16:creationId xmlns:a16="http://schemas.microsoft.com/office/drawing/2014/main" id="{E5BD1EA1-5C46-5341-8587-79D72DBEA69D}"/>
+              </a:ext>
+            </a:extLst>
+          </p:cNvPr>
+          <p:cNvSpPr>
+            <a:spLocks noGrp="1"/>
+          </p:cNvSpPr>
+          <p:nvPr>
+            <p:ph type="ctrTitle"/>
+          </p:nvPr>
+        </p:nvSpPr>
+        <p:spPr>
+          <a:xfrm>
+            <a:off x="1524000" y="1122363"/>
+            <a:ext cx="9144000" cy="2387600"/>
+          </a:xfrm>
+        </p:spPr>
+        <p:txBody>
+          <a:bodyPr anchor="b"/>
+          <a:lstStyle>
+            <a:lvl1pPr algn="ctr">
+              <a:defRPr sz="6000"/>
+            </a:lvl1pPr>
+          </a:lstStyle>
+          <a:p>
+            <a:r>
+              <a:rPr lang="en-US"/>
+              <a:t>Click to edit Master title style</a:t>
+            </a:r>
+          </a:p>
+        </p:txBody>
+      </p:sp>
+      <p:sp>
+        <p:nvSpPr>
+          <p:cNvPr id="3" name="Subtitle 2">
+            <a:extLst>
+              <a:ext uri="{FF2B5EF4-FFF2-40B4-BE49-F238E27FC236}">
+                <a16:creationId xmlns:a16="http://schemas.microsoft.com/office/drawing/2014/main" id="{E55A7D02-E489-6247-A488-5C2C9B2AC1ED}"/>
+              </a:ext>
+            </a:extLst>
+          </p:cNvPr>
+          <p:cNvSpPr>
+            <a:spLocks noGrp="1"/>
+          </p:cNvSpPr>
+          <p:nvPr>
+            <p:ph type="subTitle" idx="1"/>
+          </p:nvPr>
+        </p:nvSpPr>
+        <p:spPr>
+          <a:xfrm>
+            <a:off x="1524000" y="3602038"/>
+            <a:ext cx="9144000" cy="1655762"/>
+          </a:xfrm>
+        </p:spPr>
+        <p:txBody>
+          <a:bodyPr/>
+          <a:lstStyle>
+            <a:lvl1pPr marL="0" indent="0" algn="ctr">
+              <a:buNone/>
+              <a:defRPr sz="2400"/>
+            </a:lvl1pPr>
+            <a:lvl2pPr marL="457200" indent="0" algn="ctr">
+              <a:buNone/>
+              <a:defRPr sz="2000"/>
+            </a:lvl2pPr>
+            <a:lvl3pPr marL="914400" indent="0" algn="ctr">
+              <a:buNone/>
+              <a:defRPr sz="1800"/>
+            </a:lvl3pPr>
+            <a:lvl4pPr marL="1371600" indent="0" algn="ctr">
+              <a:buNone/>
+              <a:defRPr sz="1600"/>
+            </a:lvl4pPr>
+            <a:lvl5pPr marL="1828800" indent="0" algn="ctr">
+              <a:buNone/>
+              <a:defRPr sz="1600"/>
+            </a:lvl5pPr>
+            <a:lvl6pPr marL="2286000" indent="0" algn="ctr">
+              <a:buNone/>
+              <a:defRPr sz="1600"/>
+            </a:lvl6pPr>
+            <a:lvl7pPr marL="2743200" indent="0" algn="ctr">
+              <a:buNone/>
+              <a:defRPr sz="1600"/>
+            </a:lvl7pPr>
+            <a:lvl8pPr marL="3200400" indent="0" algn="ctr">
+              <a:buNone/>
+              <a:defRPr sz="1600"/>
+            </a:lvl8pPr>
+            <a:lvl9pPr marL="3657600" indent="0" algn="ctr">
+              <a:buNone/>
+              <a:defRPr sz="1600"/>
+            </a:lvl9pPr>
+          </a:lstStyle>
+          <a:p>
+            <a:r>
+              <a:rPr lang="en-US"/>
+              <a:t>Click to edit Master subtitle style</a:t>
+            </a:r>
+          </a:p>
+        </p:txBody>
+      </p:sp>
+      <p:sp>
+        <p:nvSpPr>
+          <p:cNvPr id="4" name="Date Placeholder 3">
+            <a:extLst>
+              <a:ext uri="{FF2B5EF4-FFF2-40B4-BE49-F238E27FC236}">
+                <a16:creationId xmlns:a16="http://schemas.microsoft.com/office/drawing/2014/main" id="{6B0B3616-05FA-A84E-879E-76D70962B0D1}"/>
+              </a:ext>
+            </a:extLst>
+          </p:cNvPr>
+          <p:cNvSpPr>
+            <a:spLocks noGrp="1"/>
+          </p:cNvSpPr>
+          <p:nvPr>
+            <p:ph type="dt" sz="half" idx="10"/>
+          </p:nvPr>
+        </p:nvSpPr>
+        <p:spPr/>
+        <p:txBody>
+          <a:bodyPr/>
+          <a:lstStyle/>
+          <a:p>
+            <a:fld id="{4EB26A4E-7CA4-0D47-BAAE-19E050D9F531}" type="datetimeFigureOut">
+              <a:rPr lang="en-US" smtClean="0"/>
+              <a:t>4/15/21</a:t>
+            </a:fld>
+            <a:endParaRPr lang="en-US"/>
+          </a:p>
+        </p:txBody>
+      </p:sp>
+      <p:sp>
+        <p:nvSpPr>
+          <p:cNvPr id="5" name="Footer Placeholder 4">
+            <a:extLst>
+              <a:ext uri="{FF2B5EF4-FFF2-40B4-BE49-F238E27FC236}">
+                <a16:creationId xmlns:a16="http://schemas.microsoft.com/office/drawing/2014/main" id="{D60A61D6-F5AF-DE42-B285-D209FD8C4053}"/>
+              </a:ext>
+            </a:extLst>
+          </p:cNvPr>
+          <p:cNvSpPr>
+            <a:spLocks noGrp="1"/>
+          </p:cNvSpPr>
+          <p:nvPr>
+            <p:ph type="ftr" sz="quarter" idx="11"/>
+          </p:nvPr>
+        </p:nvSpPr>
+        <p:spPr/>
+        <p:txBody>
+          <a:bodyPr/>
+          <a:lstStyle/>
+          <a:p>
+            <a:endParaRPr lang="en-US"/>
+          </a:p>
+        </p:txBody>
+      </p:sp>
+      <p:sp>
+        <p:nvSpPr>
+          <p:cNvPr id="6" name="Slide Number Placeholder 5">
+            <a:extLst>
+              <a:ext uri="{FF2B5EF4-FFF2-40B4-BE49-F238E27FC236}">
+                <a16:creationId xmlns:a16="http://schemas.microsoft.com/office/drawing/2014/main" id="{A8C3B590-5A43-BD4B-BCAC-54176201C095}"/>
+              </a:ext>
+            </a:extLst>
+          </p:cNvPr>
+          <p:cNvSpPr>
+            <a:spLocks noGrp="1"/>
+          </p:cNvSpPr>
+          <p:nvPr>
+            <p:ph type="sldNum" sz="quarter" idx="12"/>
+          </p:nvPr>
+        </p:nvSpPr>
+        <p:spPr/>
+        <p:txBody>
+          <a:bodyPr/>
+          <a:lstStyle/>
+          <a:p>
+            <a:fld id="{654BFB66-61B7-1948-A9D5-31EFA3C6A5E9}" type="slidenum">
+              <a:rPr lang="en-US" smtClean="0"/>
+              <a:t>‹#›</a:t>
+            </a:fld>
+            <a:endParaRPr lang="en-US"/>
+          </a:p>
+        </p:txBody>
+      </p:sp>
+    </p:spTree>
+    <p:extLst>
+      <p:ext uri="{BB962C8B-B14F-4D97-AF65-F5344CB8AC3E}">
+        <p14:creationId xmlns:p14="http://schemas.microsoft.com/office/powerpoint/2010/main" val="885931709"/>
+      </p:ext>
+    </p:extLst>
+  </p:cSld>
+  <p:clrMapOvr>
+    <a:masterClrMapping/>
+  </p:clrMapOvr>
+</p:sldLayout>
+</file>
+
 <file path=ppt/slideLayouts/slideLayout2.xml><?xml version="1.0" encoding="utf-8"?>
 <p:sldLayout xmlns:a="http://schemas.openxmlformats.org/drawingml/2006/main" xmlns:r="http://schemas.openxmlformats.org/officeDocument/2006/relationships" xmlns:p="http://schemas.openxmlformats.org/presentationml/2006/main" matchingName="Section Header" type="secHead">
   <p:cSld name="SECTION_HEADER">
@@ -12442,6 +12663,7 @@
     <p:sldLayoutId id="2147483656" r:id="rId7"/>
     <p:sldLayoutId id="2147483657" r:id="rId8"/>
     <p:sldLayoutId id="2147483658" r:id="rId9"/>
+    <p:sldLayoutId id="2147483660" r:id="rId10"/>
   </p:sldLayoutIdLst>
   <p:hf sldNum="0" hdr="0" ftr="0" dt="0"/>
   <p:txStyles>
@@ -13167,8 +13389,8 @@
         </p:nvSpPr>
         <p:spPr>
           <a:xfrm>
-            <a:off x="86379" y="265087"/>
-            <a:ext cx="6991227" cy="3323987"/>
+            <a:off x="0" y="0"/>
+            <a:ext cx="4807131" cy="523220"/>
           </a:xfrm>
           <a:prstGeom prst="rect">
             <a:avLst/>
@@ -13182,104 +13404,8 @@
           <a:lstStyle/>
           <a:p>
             <a:r>
-              <a:rPr lang="en-US" dirty="0"/>
+              <a:rPr lang="en-US" sz="2800" b="1" dirty="0"/>
               <a:t>Introduction into Statistics</a:t>
-            </a:r>
-          </a:p>
-          <a:p>
-            <a:endParaRPr lang="en-US" dirty="0"/>
-          </a:p>
-          <a:p>
-            <a:r>
-              <a:rPr lang="en-US" dirty="0"/>
-              <a:t>“Statistics is the study of the collection, analysis, </a:t>
-            </a:r>
-          </a:p>
-          <a:p>
-            <a:r>
-              <a:rPr lang="en-US" dirty="0"/>
-              <a:t>interpretation, presentation, and organization of data.” </a:t>
-            </a:r>
-          </a:p>
-          <a:p>
-            <a:endParaRPr lang="en-US" dirty="0"/>
-          </a:p>
-          <a:p>
-            <a:r>
-              <a:rPr lang="en-US" dirty="0"/>
-              <a:t>Being a Statistician is the major part of being a Data Scientist. </a:t>
-            </a:r>
-          </a:p>
-          <a:p>
-            <a:r>
-              <a:rPr lang="en-US" dirty="0"/>
-              <a:t>And it is tricky, because there is easy to misuse statistics:</a:t>
-            </a:r>
-          </a:p>
-          <a:p>
-            <a:r>
-              <a:rPr lang="en-US" b="1" dirty="0">
-                <a:solidFill>
-                  <a:srgbClr val="0070C0"/>
-                </a:solidFill>
-              </a:rPr>
-              <a:t>“There are three kinds of lies: lies, damned lies, and statistics.”</a:t>
-            </a:r>
-            <a:r>
-              <a:rPr lang="en-US" dirty="0"/>
-              <a:t> </a:t>
-            </a:r>
-          </a:p>
-          <a:p>
-            <a:endParaRPr lang="en-US" dirty="0"/>
-          </a:p>
-          <a:p>
-            <a:r>
-              <a:rPr lang="en-US" dirty="0"/>
-              <a:t>Statistics involves</a:t>
-            </a:r>
-          </a:p>
-          <a:p>
-            <a:endParaRPr lang="en-US" dirty="0"/>
-          </a:p>
-          <a:p>
-            <a:pPr marL="285750" indent="-285750">
-              <a:buFont typeface="Arial" panose="020B0604020202020204" pitchFamily="34" charset="0"/>
-              <a:buChar char="•"/>
-            </a:pPr>
-            <a:r>
-              <a:rPr lang="en-US" dirty="0"/>
-              <a:t>Collecting (sampling) the data from different kind of observations</a:t>
-            </a:r>
-          </a:p>
-          <a:p>
-            <a:pPr marL="285750" indent="-285750">
-              <a:buFont typeface="Arial" panose="020B0604020202020204" pitchFamily="34" charset="0"/>
-              <a:buChar char="•"/>
-            </a:pPr>
-            <a:r>
-              <a:rPr lang="en-US" dirty="0"/>
-              <a:t>Visualizing the data, estimating the parameters (average/mean values, errors, etc.)</a:t>
-            </a:r>
-          </a:p>
-          <a:p>
-            <a:pPr marL="285750" indent="-285750">
-              <a:buFont typeface="Arial" panose="020B0604020202020204" pitchFamily="34" charset="0"/>
-              <a:buChar char="•"/>
-            </a:pPr>
-            <a:r>
-              <a:rPr lang="en-US" dirty="0"/>
-              <a:t>Testing validity of a hypothesis (null hypothesis) – or alternative hypothesis</a:t>
-            </a:r>
-          </a:p>
-          <a:p>
-            <a:pPr marL="285750" indent="-285750">
-              <a:buFont typeface="Arial" panose="020B0604020202020204" pitchFamily="34" charset="0"/>
-              <a:buChar char="•"/>
-            </a:pPr>
-            <a:r>
-              <a:rPr lang="en-US" dirty="0"/>
-              <a:t>Estimating intervals, estimating significance of observed differences, etc.</a:t>
             </a:r>
           </a:p>
         </p:txBody>
@@ -13334,8 +13460,8 @@
         </p:nvSpPr>
         <p:spPr>
           <a:xfrm>
-            <a:off x="7712242" y="433137"/>
-            <a:ext cx="3019926" cy="307777"/>
+            <a:off x="8020423" y="200054"/>
+            <a:ext cx="3019926" cy="646331"/>
           </a:xfrm>
           <a:prstGeom prst="rect">
             <a:avLst/>
@@ -13349,7 +13475,7 @@
           <a:lstStyle/>
           <a:p>
             <a:r>
-              <a:rPr lang="en-US" b="1" dirty="0">
+              <a:rPr lang="en-US" sz="1800" b="1" dirty="0">
                 <a:solidFill>
                   <a:srgbClr val="0070C0"/>
                 </a:solidFill>
@@ -13373,8 +13499,8 @@
         </p:nvSpPr>
         <p:spPr>
           <a:xfrm>
-            <a:off x="7074568" y="5029200"/>
-            <a:ext cx="4920916" cy="1600438"/>
+            <a:off x="7438183" y="4859993"/>
+            <a:ext cx="4664171" cy="1815882"/>
           </a:xfrm>
           <a:prstGeom prst="rect">
             <a:avLst/>
@@ -13431,6 +13557,179 @@
           </a:p>
         </p:txBody>
       </p:sp>
+      <p:sp>
+        <p:nvSpPr>
+          <p:cNvPr id="7" name="TextBox 6">
+            <a:extLst>
+              <a:ext uri="{FF2B5EF4-FFF2-40B4-BE49-F238E27FC236}">
+                <a16:creationId xmlns:a16="http://schemas.microsoft.com/office/drawing/2014/main" id="{A0F1F507-013B-404F-8201-ACF41C87EF19}"/>
+              </a:ext>
+            </a:extLst>
+          </p:cNvPr>
+          <p:cNvSpPr txBox="1"/>
+          <p:nvPr/>
+        </p:nvSpPr>
+        <p:spPr>
+          <a:xfrm>
+            <a:off x="83341" y="791240"/>
+            <a:ext cx="6991227" cy="3323987"/>
+          </a:xfrm>
+          <a:prstGeom prst="rect">
+            <a:avLst/>
+          </a:prstGeom>
+          <a:noFill/>
+        </p:spPr>
+        <p:txBody>
+          <a:bodyPr wrap="square" rtlCol="0">
+            <a:spAutoFit/>
+          </a:bodyPr>
+          <a:lstStyle/>
+          <a:p>
+            <a:r>
+              <a:rPr lang="en-US" b="1" dirty="0">
+                <a:solidFill>
+                  <a:srgbClr val="0070C0"/>
+                </a:solidFill>
+              </a:rPr>
+              <a:t>“Statistics is the study of the collection, analysis, </a:t>
+            </a:r>
+          </a:p>
+          <a:p>
+            <a:r>
+              <a:rPr lang="en-US" b="1" dirty="0">
+                <a:solidFill>
+                  <a:srgbClr val="0070C0"/>
+                </a:solidFill>
+              </a:rPr>
+              <a:t>interpretation, presentation, and organization of data.” </a:t>
+            </a:r>
+          </a:p>
+          <a:p>
+            <a:endParaRPr lang="en-US" dirty="0"/>
+          </a:p>
+          <a:p>
+            <a:endParaRPr lang="en-US" dirty="0"/>
+          </a:p>
+          <a:p>
+            <a:r>
+              <a:rPr lang="en-US" dirty="0"/>
+              <a:t>Being a Statistician is the major part of being a Data Scientist. </a:t>
+            </a:r>
+          </a:p>
+          <a:p>
+            <a:r>
+              <a:rPr lang="en-US" dirty="0"/>
+              <a:t>And it is tricky, because there is easy to misuse statistics:</a:t>
+            </a:r>
+          </a:p>
+          <a:p>
+            <a:r>
+              <a:rPr lang="en-US" b="1" dirty="0">
+                <a:solidFill>
+                  <a:srgbClr val="0070C0"/>
+                </a:solidFill>
+              </a:rPr>
+              <a:t>“There are three kinds of lies: lies, damned lies, and statistics.”</a:t>
+            </a:r>
+            <a:r>
+              <a:rPr lang="en-US" dirty="0"/>
+              <a:t> </a:t>
+            </a:r>
+          </a:p>
+          <a:p>
+            <a:endParaRPr lang="en-US" dirty="0"/>
+          </a:p>
+          <a:p>
+            <a:endParaRPr lang="en-US" dirty="0"/>
+          </a:p>
+          <a:p>
+            <a:r>
+              <a:rPr lang="en-US" dirty="0"/>
+              <a:t>Statistics involves</a:t>
+            </a:r>
+          </a:p>
+          <a:p>
+            <a:endParaRPr lang="en-US" dirty="0"/>
+          </a:p>
+          <a:p>
+            <a:pPr marL="285750" indent="-285750">
+              <a:buFont typeface="Arial" panose="020B0604020202020204" pitchFamily="34" charset="0"/>
+              <a:buChar char="•"/>
+            </a:pPr>
+            <a:r>
+              <a:rPr lang="en-US" dirty="0"/>
+              <a:t>Collecting (sampling) the data from different kind of observations</a:t>
+            </a:r>
+          </a:p>
+          <a:p>
+            <a:pPr marL="285750" indent="-285750">
+              <a:buFont typeface="Arial" panose="020B0604020202020204" pitchFamily="34" charset="0"/>
+              <a:buChar char="•"/>
+            </a:pPr>
+            <a:r>
+              <a:rPr lang="en-US" dirty="0"/>
+              <a:t>Visualizing the data, estimating the parameters (average/mean values, errors, etc.)</a:t>
+            </a:r>
+          </a:p>
+          <a:p>
+            <a:pPr marL="285750" indent="-285750">
+              <a:buFont typeface="Arial" panose="020B0604020202020204" pitchFamily="34" charset="0"/>
+              <a:buChar char="•"/>
+            </a:pPr>
+            <a:r>
+              <a:rPr lang="en-US" dirty="0"/>
+              <a:t>Testing validity of a hypothesis (null hypothesis) – or alternative hypothesis</a:t>
+            </a:r>
+          </a:p>
+          <a:p>
+            <a:pPr marL="285750" indent="-285750">
+              <a:buFont typeface="Arial" panose="020B0604020202020204" pitchFamily="34" charset="0"/>
+              <a:buChar char="•"/>
+            </a:pPr>
+            <a:r>
+              <a:rPr lang="en-US" dirty="0"/>
+              <a:t>Estimating intervals, estimating significance of observed differences, etc.</a:t>
+            </a:r>
+          </a:p>
+        </p:txBody>
+      </p:sp>
+      <p:cxnSp>
+        <p:nvCxnSpPr>
+          <p:cNvPr id="8" name="Straight Connector 7">
+            <a:extLst>
+              <a:ext uri="{FF2B5EF4-FFF2-40B4-BE49-F238E27FC236}">
+                <a16:creationId xmlns:a16="http://schemas.microsoft.com/office/drawing/2014/main" id="{FF42AB10-A6DB-5944-AAE8-E9970EE78AEC}"/>
+              </a:ext>
+            </a:extLst>
+          </p:cNvPr>
+          <p:cNvCxnSpPr/>
+          <p:nvPr/>
+        </p:nvCxnSpPr>
+        <p:spPr>
+          <a:xfrm>
+            <a:off x="7262949" y="169817"/>
+            <a:ext cx="0" cy="4545874"/>
+          </a:xfrm>
+          <a:prstGeom prst="line">
+            <a:avLst/>
+          </a:prstGeom>
+          <a:ln w="63500"/>
+        </p:spPr>
+        <p:style>
+          <a:lnRef idx="1">
+            <a:schemeClr val="accent1"/>
+          </a:lnRef>
+          <a:fillRef idx="0">
+            <a:schemeClr val="accent1"/>
+          </a:fillRef>
+          <a:effectRef idx="0">
+            <a:schemeClr val="accent1"/>
+          </a:effectRef>
+          <a:fontRef idx="minor">
+            <a:schemeClr val="tx1"/>
+          </a:fontRef>
+        </p:style>
+      </p:cxnSp>
     </p:spTree>
     <p:extLst>
       <p:ext uri="{BB962C8B-B14F-4D97-AF65-F5344CB8AC3E}">
@@ -13543,14 +13842,42 @@
           </a:p>
           <a:p>
             <a:r>
+              <a:rPr lang="en-US" b="1" dirty="0">
+                <a:solidFill>
+                  <a:srgbClr val="0070C0"/>
+                </a:solidFill>
+              </a:rPr>
+              <a:t>SME</a:t>
+            </a:r>
+            <a:r>
               <a:rPr lang="en-US" dirty="0"/>
-              <a:t>SME = Standard Mean Error = Standard Deviation</a:t>
+              <a:t> = Standard Mean Error = Standard Deviation</a:t>
             </a:r>
           </a:p>
           <a:p>
             <a:r>
+              <a:rPr lang="en-US" b="1" dirty="0">
+                <a:solidFill>
+                  <a:srgbClr val="0070C0"/>
+                </a:solidFill>
+              </a:rPr>
+              <a:t>SEM</a:t>
+            </a:r>
+            <a:r>
               <a:rPr lang="en-US" dirty="0"/>
-              <a:t>SEM = Standard Error of Mean = SME / sqrt(n)</a:t>
+              <a:t> = Standard Error of Mean = </a:t>
+            </a:r>
+            <a:r>
+              <a:rPr lang="en-US" b="1" dirty="0">
+                <a:solidFill>
+                  <a:srgbClr val="0070C0"/>
+                </a:solidFill>
+              </a:rPr>
+              <a:t>SME</a:t>
+            </a:r>
+            <a:r>
+              <a:rPr lang="en-US" dirty="0"/>
+              <a:t> / sqrt(n)</a:t>
             </a:r>
           </a:p>
         </p:txBody>
@@ -14720,6 +15047,2333 @@
     <p:extLst>
       <p:ext uri="{BB962C8B-B14F-4D97-AF65-F5344CB8AC3E}">
         <p14:creationId xmlns:p14="http://schemas.microsoft.com/office/powerpoint/2010/main" val="557835987"/>
+      </p:ext>
+    </p:extLst>
+  </p:cSld>
+  <p:clrMapOvr>
+    <a:masterClrMapping/>
+  </p:clrMapOvr>
+</p:sld>
+</file>
+
+<file path=ppt/slides/slide3.xml><?xml version="1.0" encoding="utf-8"?>
+<p:sld xmlns:a="http://schemas.openxmlformats.org/drawingml/2006/main" xmlns:r="http://schemas.openxmlformats.org/officeDocument/2006/relationships" xmlns:p="http://schemas.openxmlformats.org/presentationml/2006/main">
+  <p:cSld>
+    <p:spTree>
+      <p:nvGrpSpPr>
+        <p:cNvPr id="1" name=""/>
+        <p:cNvGrpSpPr/>
+        <p:nvPr/>
+      </p:nvGrpSpPr>
+      <p:grpSpPr>
+        <a:xfrm>
+          <a:off x="0" y="0"/>
+          <a:ext cx="0" cy="0"/>
+          <a:chOff x="0" y="0"/>
+          <a:chExt cx="0" cy="0"/>
+        </a:xfrm>
+      </p:grpSpPr>
+      <p:sp>
+        <p:nvSpPr>
+          <p:cNvPr id="4" name="TextBox 3">
+            <a:extLst>
+              <a:ext uri="{FF2B5EF4-FFF2-40B4-BE49-F238E27FC236}">
+                <a16:creationId xmlns:a16="http://schemas.microsoft.com/office/drawing/2014/main" id="{95B531CD-91CB-B449-AC6B-B8E8D0567AE3}"/>
+              </a:ext>
+            </a:extLst>
+          </p:cNvPr>
+          <p:cNvSpPr txBox="1"/>
+          <p:nvPr/>
+        </p:nvSpPr>
+        <p:spPr>
+          <a:xfrm>
+            <a:off x="115993" y="99146"/>
+            <a:ext cx="4810500" cy="584775"/>
+          </a:xfrm>
+          <a:prstGeom prst="rect">
+            <a:avLst/>
+          </a:prstGeom>
+          <a:noFill/>
+        </p:spPr>
+        <p:txBody>
+          <a:bodyPr wrap="square" rtlCol="0">
+            <a:spAutoFit/>
+          </a:bodyPr>
+          <a:lstStyle/>
+          <a:p>
+            <a:r>
+              <a:rPr lang="en-US" sz="3200" b="1" dirty="0"/>
+              <a:t>Error of the mean</a:t>
+            </a:r>
+          </a:p>
+        </p:txBody>
+      </p:sp>
+      <p:pic>
+        <p:nvPicPr>
+          <p:cNvPr id="1026" name="Picture 2" descr="Standard Error Calculator. you can use this Standard Error… | by Thelma R.  White | Medium">
+            <a:extLst>
+              <a:ext uri="{FF2B5EF4-FFF2-40B4-BE49-F238E27FC236}">
+                <a16:creationId xmlns:a16="http://schemas.microsoft.com/office/drawing/2014/main" id="{9D7D50A9-956F-4845-8823-1033B7CB3CB7}"/>
+              </a:ext>
+            </a:extLst>
+          </p:cNvPr>
+          <p:cNvPicPr>
+            <a:picLocks noChangeAspect="1" noChangeArrowheads="1"/>
+          </p:cNvPicPr>
+          <p:nvPr/>
+        </p:nvPicPr>
+        <p:blipFill>
+          <a:blip r:embed="rId2">
+            <a:extLst>
+              <a:ext uri="{28A0092B-C50C-407E-A947-70E740481C1C}">
+                <a14:useLocalDpi xmlns:a14="http://schemas.microsoft.com/office/drawing/2010/main"/>
+              </a:ext>
+            </a:extLst>
+          </a:blip>
+          <a:srcRect/>
+          <a:stretch>
+            <a:fillRect/>
+          </a:stretch>
+        </p:blipFill>
+        <p:spPr bwMode="auto">
+          <a:xfrm>
+            <a:off x="7929025" y="433176"/>
+            <a:ext cx="3810000" cy="2997200"/>
+          </a:xfrm>
+          <a:prstGeom prst="rect">
+            <a:avLst/>
+          </a:prstGeom>
+          <a:noFill/>
+          <a:extLst>
+            <a:ext uri="{909E8E84-426E-40DD-AFC4-6F175D3DCCD1}">
+              <a14:hiddenFill xmlns:a14="http://schemas.microsoft.com/office/drawing/2010/main">
+                <a:solidFill>
+                  <a:srgbClr val="FFFFFF"/>
+                </a:solidFill>
+              </a14:hiddenFill>
+            </a:ext>
+          </a:extLst>
+        </p:spPr>
+      </p:pic>
+      <p:sp>
+        <p:nvSpPr>
+          <p:cNvPr id="2" name="TextBox 1">
+            <a:extLst>
+              <a:ext uri="{FF2B5EF4-FFF2-40B4-BE49-F238E27FC236}">
+                <a16:creationId xmlns:a16="http://schemas.microsoft.com/office/drawing/2014/main" id="{2DFE2259-D413-B348-98BD-F5E7DB5E4176}"/>
+              </a:ext>
+            </a:extLst>
+          </p:cNvPr>
+          <p:cNvSpPr txBox="1"/>
+          <p:nvPr/>
+        </p:nvSpPr>
+        <p:spPr>
+          <a:xfrm>
+            <a:off x="115993" y="733281"/>
+            <a:ext cx="5469408" cy="3539430"/>
+          </a:xfrm>
+          <a:prstGeom prst="rect">
+            <a:avLst/>
+          </a:prstGeom>
+          <a:noFill/>
+        </p:spPr>
+        <p:txBody>
+          <a:bodyPr wrap="square" rtlCol="0">
+            <a:spAutoFit/>
+          </a:bodyPr>
+          <a:lstStyle/>
+          <a:p>
+            <a:r>
+              <a:rPr lang="en-US" sz="1400" dirty="0"/>
+              <a:t>Suppose we have two samples A and B, </a:t>
+            </a:r>
+          </a:p>
+          <a:p>
+            <a:r>
+              <a:rPr lang="en-US" sz="1400" dirty="0"/>
+              <a:t>each has "n" points, where n is relatively large (100+ points), </a:t>
+            </a:r>
+          </a:p>
+          <a:p>
+            <a:r>
+              <a:rPr lang="en-US" sz="1400" dirty="0"/>
+              <a:t>and distributions have "normal" shape </a:t>
+            </a:r>
+          </a:p>
+          <a:p>
+            <a:r>
+              <a:rPr lang="en-US" sz="1400" dirty="0"/>
+              <a:t>with same sample standard deviation "s".</a:t>
+            </a:r>
+          </a:p>
+          <a:p>
+            <a:endParaRPr lang="en-US" sz="1400" dirty="0"/>
+          </a:p>
+          <a:p>
+            <a:r>
+              <a:rPr lang="en-US" sz="1400" dirty="0"/>
+              <a:t>The mean values are m</a:t>
+            </a:r>
+            <a:r>
+              <a:rPr lang="en-US" sz="1400" baseline="-25000" dirty="0"/>
+              <a:t>A</a:t>
+            </a:r>
+            <a:r>
+              <a:rPr lang="en-US" sz="1400" dirty="0"/>
+              <a:t> and </a:t>
+            </a:r>
+            <a:r>
+              <a:rPr lang="en-US" sz="1400" dirty="0" err="1"/>
+              <a:t>m</a:t>
+            </a:r>
+            <a:r>
+              <a:rPr lang="en-US" sz="1400" baseline="-25000" dirty="0" err="1"/>
+              <a:t>B</a:t>
+            </a:r>
+            <a:endParaRPr lang="en-US" sz="1400" baseline="-25000" dirty="0"/>
+          </a:p>
+          <a:p>
+            <a:endParaRPr lang="en-US" sz="1400" dirty="0"/>
+          </a:p>
+          <a:p>
+            <a:r>
+              <a:rPr lang="en-US" sz="1400" dirty="0"/>
+              <a:t>The standard error of the mean </a:t>
+            </a:r>
+            <a:r>
+              <a:rPr lang="en-US" sz="1400" dirty="0" err="1"/>
+              <a:t>sem</a:t>
+            </a:r>
+            <a:r>
+              <a:rPr lang="en-US" sz="1400" dirty="0"/>
+              <a:t> = s/sqrt(n)</a:t>
+            </a:r>
+          </a:p>
+          <a:p>
+            <a:endParaRPr lang="en-US" sz="1400" dirty="0"/>
+          </a:p>
+          <a:p>
+            <a:r>
+              <a:rPr lang="en-US" sz="1400" dirty="0"/>
+              <a:t>Question – how big should be number of points so that we</a:t>
+            </a:r>
+          </a:p>
+          <a:p>
+            <a:r>
+              <a:rPr lang="en-US" sz="1400" dirty="0"/>
+              <a:t>can say that the means differ?</a:t>
+            </a:r>
+          </a:p>
+          <a:p>
+            <a:endParaRPr lang="en-US" sz="1400" dirty="0"/>
+          </a:p>
+          <a:p>
+            <a:r>
+              <a:rPr lang="en-US" sz="1400" dirty="0"/>
+              <a:t>We can demand that </a:t>
+            </a:r>
+            <a:r>
+              <a:rPr lang="el-GR" sz="1400" b="1" dirty="0"/>
+              <a:t>δ</a:t>
+            </a:r>
+            <a:r>
+              <a:rPr lang="en-US" sz="1400" dirty="0"/>
+              <a:t> = |m</a:t>
+            </a:r>
+            <a:r>
+              <a:rPr lang="en-US" sz="1400" baseline="-25000" dirty="0"/>
+              <a:t>A</a:t>
+            </a:r>
+            <a:r>
+              <a:rPr lang="en-US" sz="1400" dirty="0"/>
+              <a:t> - </a:t>
+            </a:r>
+            <a:r>
+              <a:rPr lang="en-US" sz="1400" dirty="0" err="1"/>
+              <a:t>m</a:t>
+            </a:r>
+            <a:r>
+              <a:rPr lang="en-US" sz="1400" baseline="-25000" dirty="0" err="1"/>
+              <a:t>B</a:t>
+            </a:r>
+            <a:r>
+              <a:rPr lang="en-US" sz="1400" dirty="0"/>
+              <a:t>| &gt;= 4*</a:t>
+            </a:r>
+            <a:r>
+              <a:rPr lang="en-US" sz="1400" dirty="0" err="1"/>
+              <a:t>sem</a:t>
+            </a:r>
+            <a:r>
+              <a:rPr lang="en-US" sz="1400" dirty="0"/>
+              <a:t> = 4s/sqrt(n)</a:t>
+            </a:r>
+          </a:p>
+          <a:p>
+            <a:r>
+              <a:rPr lang="en-US" sz="1400" dirty="0"/>
+              <a:t>Or</a:t>
+            </a:r>
+          </a:p>
+          <a:p>
+            <a:r>
+              <a:rPr lang="en-US" sz="1400" dirty="0"/>
+              <a:t>               n &gt;= 16s</a:t>
+            </a:r>
+            <a:r>
+              <a:rPr lang="en-US" sz="1400" baseline="30000" dirty="0"/>
+              <a:t>2</a:t>
+            </a:r>
+            <a:r>
+              <a:rPr lang="en-US" sz="1400" dirty="0"/>
+              <a:t>/</a:t>
+            </a:r>
+            <a:r>
+              <a:rPr lang="el-GR" sz="1400" dirty="0"/>
+              <a:t>δ</a:t>
+            </a:r>
+            <a:r>
+              <a:rPr lang="en-US" sz="1400" baseline="30000" dirty="0"/>
+              <a:t>2</a:t>
+            </a:r>
+            <a:endParaRPr lang="en-US" sz="1400" dirty="0"/>
+          </a:p>
+          <a:p>
+            <a:endParaRPr lang="en-US" sz="1400" dirty="0"/>
+          </a:p>
+        </p:txBody>
+      </p:sp>
+      <p:grpSp>
+        <p:nvGrpSpPr>
+          <p:cNvPr id="14" name="Group 13">
+            <a:extLst>
+              <a:ext uri="{FF2B5EF4-FFF2-40B4-BE49-F238E27FC236}">
+                <a16:creationId xmlns:a16="http://schemas.microsoft.com/office/drawing/2014/main" id="{25F2B29D-2214-FE4C-B190-AD3AC3ACA5BC}"/>
+              </a:ext>
+            </a:extLst>
+          </p:cNvPr>
+          <p:cNvGrpSpPr/>
+          <p:nvPr/>
+        </p:nvGrpSpPr>
+        <p:grpSpPr>
+          <a:xfrm>
+            <a:off x="5046074" y="3592743"/>
+            <a:ext cx="2448817" cy="1458655"/>
+            <a:chOff x="529389" y="4535701"/>
+            <a:chExt cx="2448817" cy="1458655"/>
+          </a:xfrm>
+        </p:grpSpPr>
+        <p:sp>
+          <p:nvSpPr>
+            <p:cNvPr id="13" name="Freeform 12">
+              <a:extLst>
+                <a:ext uri="{FF2B5EF4-FFF2-40B4-BE49-F238E27FC236}">
+                  <a16:creationId xmlns:a16="http://schemas.microsoft.com/office/drawing/2014/main" id="{039894F7-85E1-FA42-989C-AB3BA9BE1FE8}"/>
+                </a:ext>
+              </a:extLst>
+            </p:cNvPr>
+            <p:cNvSpPr/>
+            <p:nvPr/>
+          </p:nvSpPr>
+          <p:spPr>
+            <a:xfrm>
+              <a:off x="529389" y="4550566"/>
+              <a:ext cx="1828800" cy="1443790"/>
+            </a:xfrm>
+            <a:custGeom>
+              <a:avLst/>
+              <a:gdLst>
+                <a:gd name="connsiteX0" fmla="*/ 0 w 1828800"/>
+                <a:gd name="connsiteY0" fmla="*/ 1443790 h 1443790"/>
+                <a:gd name="connsiteX1" fmla="*/ 112295 w 1828800"/>
+                <a:gd name="connsiteY1" fmla="*/ 1411706 h 1443790"/>
+                <a:gd name="connsiteX2" fmla="*/ 160422 w 1828800"/>
+                <a:gd name="connsiteY2" fmla="*/ 1395664 h 1443790"/>
+                <a:gd name="connsiteX3" fmla="*/ 256674 w 1828800"/>
+                <a:gd name="connsiteY3" fmla="*/ 1347537 h 1443790"/>
+                <a:gd name="connsiteX4" fmla="*/ 320843 w 1828800"/>
+                <a:gd name="connsiteY4" fmla="*/ 1251285 h 1443790"/>
+                <a:gd name="connsiteX5" fmla="*/ 352927 w 1828800"/>
+                <a:gd name="connsiteY5" fmla="*/ 1219200 h 1443790"/>
+                <a:gd name="connsiteX6" fmla="*/ 417095 w 1828800"/>
+                <a:gd name="connsiteY6" fmla="*/ 1122948 h 1443790"/>
+                <a:gd name="connsiteX7" fmla="*/ 449179 w 1828800"/>
+                <a:gd name="connsiteY7" fmla="*/ 1074821 h 1443790"/>
+                <a:gd name="connsiteX8" fmla="*/ 497306 w 1828800"/>
+                <a:gd name="connsiteY8" fmla="*/ 978569 h 1443790"/>
+                <a:gd name="connsiteX9" fmla="*/ 561474 w 1828800"/>
+                <a:gd name="connsiteY9" fmla="*/ 866274 h 1443790"/>
+                <a:gd name="connsiteX10" fmla="*/ 609600 w 1828800"/>
+                <a:gd name="connsiteY10" fmla="*/ 705853 h 1443790"/>
+                <a:gd name="connsiteX11" fmla="*/ 625643 w 1828800"/>
+                <a:gd name="connsiteY11" fmla="*/ 657727 h 1443790"/>
+                <a:gd name="connsiteX12" fmla="*/ 657727 w 1828800"/>
+                <a:gd name="connsiteY12" fmla="*/ 625642 h 1443790"/>
+                <a:gd name="connsiteX13" fmla="*/ 689811 w 1828800"/>
+                <a:gd name="connsiteY13" fmla="*/ 465221 h 1443790"/>
+                <a:gd name="connsiteX14" fmla="*/ 721895 w 1828800"/>
+                <a:gd name="connsiteY14" fmla="*/ 368969 h 1443790"/>
+                <a:gd name="connsiteX15" fmla="*/ 737937 w 1828800"/>
+                <a:gd name="connsiteY15" fmla="*/ 320842 h 1443790"/>
+                <a:gd name="connsiteX16" fmla="*/ 770022 w 1828800"/>
+                <a:gd name="connsiteY16" fmla="*/ 224590 h 1443790"/>
+                <a:gd name="connsiteX17" fmla="*/ 834190 w 1828800"/>
+                <a:gd name="connsiteY17" fmla="*/ 128337 h 1443790"/>
+                <a:gd name="connsiteX18" fmla="*/ 850232 w 1828800"/>
+                <a:gd name="connsiteY18" fmla="*/ 80211 h 1443790"/>
+                <a:gd name="connsiteX19" fmla="*/ 914400 w 1828800"/>
+                <a:gd name="connsiteY19" fmla="*/ 0 h 1443790"/>
+                <a:gd name="connsiteX20" fmla="*/ 1026695 w 1828800"/>
+                <a:gd name="connsiteY20" fmla="*/ 16042 h 1443790"/>
+                <a:gd name="connsiteX21" fmla="*/ 1058779 w 1828800"/>
+                <a:gd name="connsiteY21" fmla="*/ 112295 h 1443790"/>
+                <a:gd name="connsiteX22" fmla="*/ 1106906 w 1828800"/>
+                <a:gd name="connsiteY22" fmla="*/ 256674 h 1443790"/>
+                <a:gd name="connsiteX23" fmla="*/ 1122948 w 1828800"/>
+                <a:gd name="connsiteY23" fmla="*/ 304800 h 1443790"/>
+                <a:gd name="connsiteX24" fmla="*/ 1155032 w 1828800"/>
+                <a:gd name="connsiteY24" fmla="*/ 336885 h 1443790"/>
+                <a:gd name="connsiteX25" fmla="*/ 1203158 w 1828800"/>
+                <a:gd name="connsiteY25" fmla="*/ 481264 h 1443790"/>
+                <a:gd name="connsiteX26" fmla="*/ 1219200 w 1828800"/>
+                <a:gd name="connsiteY26" fmla="*/ 529390 h 1443790"/>
+                <a:gd name="connsiteX27" fmla="*/ 1251285 w 1828800"/>
+                <a:gd name="connsiteY27" fmla="*/ 657727 h 1443790"/>
+                <a:gd name="connsiteX28" fmla="*/ 1267327 w 1828800"/>
+                <a:gd name="connsiteY28" fmla="*/ 705853 h 1443790"/>
+                <a:gd name="connsiteX29" fmla="*/ 1283369 w 1828800"/>
+                <a:gd name="connsiteY29" fmla="*/ 770021 h 1443790"/>
+                <a:gd name="connsiteX30" fmla="*/ 1299411 w 1828800"/>
+                <a:gd name="connsiteY30" fmla="*/ 818148 h 1443790"/>
+                <a:gd name="connsiteX31" fmla="*/ 1347537 w 1828800"/>
+                <a:gd name="connsiteY31" fmla="*/ 978569 h 1443790"/>
+                <a:gd name="connsiteX32" fmla="*/ 1379622 w 1828800"/>
+                <a:gd name="connsiteY32" fmla="*/ 1010653 h 1443790"/>
+                <a:gd name="connsiteX33" fmla="*/ 1411706 w 1828800"/>
+                <a:gd name="connsiteY33" fmla="*/ 1106906 h 1443790"/>
+                <a:gd name="connsiteX34" fmla="*/ 1443790 w 1828800"/>
+                <a:gd name="connsiteY34" fmla="*/ 1155032 h 1443790"/>
+                <a:gd name="connsiteX35" fmla="*/ 1459832 w 1828800"/>
+                <a:gd name="connsiteY35" fmla="*/ 1203158 h 1443790"/>
+                <a:gd name="connsiteX36" fmla="*/ 1540043 w 1828800"/>
+                <a:gd name="connsiteY36" fmla="*/ 1283369 h 1443790"/>
+                <a:gd name="connsiteX37" fmla="*/ 1620253 w 1828800"/>
+                <a:gd name="connsiteY37" fmla="*/ 1363579 h 1443790"/>
+                <a:gd name="connsiteX38" fmla="*/ 1764632 w 1828800"/>
+                <a:gd name="connsiteY38" fmla="*/ 1411706 h 1443790"/>
+                <a:gd name="connsiteX39" fmla="*/ 1828800 w 1828800"/>
+                <a:gd name="connsiteY39" fmla="*/ 1443790 h 1443790"/>
+              </a:gdLst>
+              <a:ahLst/>
+              <a:cxnLst>
+                <a:cxn ang="0">
+                  <a:pos x="connsiteX0" y="connsiteY0"/>
+                </a:cxn>
+                <a:cxn ang="0">
+                  <a:pos x="connsiteX1" y="connsiteY1"/>
+                </a:cxn>
+                <a:cxn ang="0">
+                  <a:pos x="connsiteX2" y="connsiteY2"/>
+                </a:cxn>
+                <a:cxn ang="0">
+                  <a:pos x="connsiteX3" y="connsiteY3"/>
+                </a:cxn>
+                <a:cxn ang="0">
+                  <a:pos x="connsiteX4" y="connsiteY4"/>
+                </a:cxn>
+                <a:cxn ang="0">
+                  <a:pos x="connsiteX5" y="connsiteY5"/>
+                </a:cxn>
+                <a:cxn ang="0">
+                  <a:pos x="connsiteX6" y="connsiteY6"/>
+                </a:cxn>
+                <a:cxn ang="0">
+                  <a:pos x="connsiteX7" y="connsiteY7"/>
+                </a:cxn>
+                <a:cxn ang="0">
+                  <a:pos x="connsiteX8" y="connsiteY8"/>
+                </a:cxn>
+                <a:cxn ang="0">
+                  <a:pos x="connsiteX9" y="connsiteY9"/>
+                </a:cxn>
+                <a:cxn ang="0">
+                  <a:pos x="connsiteX10" y="connsiteY10"/>
+                </a:cxn>
+                <a:cxn ang="0">
+                  <a:pos x="connsiteX11" y="connsiteY11"/>
+                </a:cxn>
+                <a:cxn ang="0">
+                  <a:pos x="connsiteX12" y="connsiteY12"/>
+                </a:cxn>
+                <a:cxn ang="0">
+                  <a:pos x="connsiteX13" y="connsiteY13"/>
+                </a:cxn>
+                <a:cxn ang="0">
+                  <a:pos x="connsiteX14" y="connsiteY14"/>
+                </a:cxn>
+                <a:cxn ang="0">
+                  <a:pos x="connsiteX15" y="connsiteY15"/>
+                </a:cxn>
+                <a:cxn ang="0">
+                  <a:pos x="connsiteX16" y="connsiteY16"/>
+                </a:cxn>
+                <a:cxn ang="0">
+                  <a:pos x="connsiteX17" y="connsiteY17"/>
+                </a:cxn>
+                <a:cxn ang="0">
+                  <a:pos x="connsiteX18" y="connsiteY18"/>
+                </a:cxn>
+                <a:cxn ang="0">
+                  <a:pos x="connsiteX19" y="connsiteY19"/>
+                </a:cxn>
+                <a:cxn ang="0">
+                  <a:pos x="connsiteX20" y="connsiteY20"/>
+                </a:cxn>
+                <a:cxn ang="0">
+                  <a:pos x="connsiteX21" y="connsiteY21"/>
+                </a:cxn>
+                <a:cxn ang="0">
+                  <a:pos x="connsiteX22" y="connsiteY22"/>
+                </a:cxn>
+                <a:cxn ang="0">
+                  <a:pos x="connsiteX23" y="connsiteY23"/>
+                </a:cxn>
+                <a:cxn ang="0">
+                  <a:pos x="connsiteX24" y="connsiteY24"/>
+                </a:cxn>
+                <a:cxn ang="0">
+                  <a:pos x="connsiteX25" y="connsiteY25"/>
+                </a:cxn>
+                <a:cxn ang="0">
+                  <a:pos x="connsiteX26" y="connsiteY26"/>
+                </a:cxn>
+                <a:cxn ang="0">
+                  <a:pos x="connsiteX27" y="connsiteY27"/>
+                </a:cxn>
+                <a:cxn ang="0">
+                  <a:pos x="connsiteX28" y="connsiteY28"/>
+                </a:cxn>
+                <a:cxn ang="0">
+                  <a:pos x="connsiteX29" y="connsiteY29"/>
+                </a:cxn>
+                <a:cxn ang="0">
+                  <a:pos x="connsiteX30" y="connsiteY30"/>
+                </a:cxn>
+                <a:cxn ang="0">
+                  <a:pos x="connsiteX31" y="connsiteY31"/>
+                </a:cxn>
+                <a:cxn ang="0">
+                  <a:pos x="connsiteX32" y="connsiteY32"/>
+                </a:cxn>
+                <a:cxn ang="0">
+                  <a:pos x="connsiteX33" y="connsiteY33"/>
+                </a:cxn>
+                <a:cxn ang="0">
+                  <a:pos x="connsiteX34" y="connsiteY34"/>
+                </a:cxn>
+                <a:cxn ang="0">
+                  <a:pos x="connsiteX35" y="connsiteY35"/>
+                </a:cxn>
+                <a:cxn ang="0">
+                  <a:pos x="connsiteX36" y="connsiteY36"/>
+                </a:cxn>
+                <a:cxn ang="0">
+                  <a:pos x="connsiteX37" y="connsiteY37"/>
+                </a:cxn>
+                <a:cxn ang="0">
+                  <a:pos x="connsiteX38" y="connsiteY38"/>
+                </a:cxn>
+                <a:cxn ang="0">
+                  <a:pos x="connsiteX39" y="connsiteY39"/>
+                </a:cxn>
+              </a:cxnLst>
+              <a:rect l="l" t="t" r="r" b="b"/>
+              <a:pathLst>
+                <a:path w="1828800" h="1443790">
+                  <a:moveTo>
+                    <a:pt x="0" y="1443790"/>
+                  </a:moveTo>
+                  <a:lnTo>
+                    <a:pt x="112295" y="1411706"/>
+                  </a:lnTo>
+                  <a:cubicBezTo>
+                    <a:pt x="128492" y="1406847"/>
+                    <a:pt x="145297" y="1403226"/>
+                    <a:pt x="160422" y="1395664"/>
+                  </a:cubicBezTo>
+                  <a:cubicBezTo>
+                    <a:pt x="284817" y="1333466"/>
+                    <a:pt x="135705" y="1387860"/>
+                    <a:pt x="256674" y="1347537"/>
+                  </a:cubicBezTo>
+                  <a:cubicBezTo>
+                    <a:pt x="278064" y="1315453"/>
+                    <a:pt x="293577" y="1278552"/>
+                    <a:pt x="320843" y="1251285"/>
+                  </a:cubicBezTo>
+                  <a:cubicBezTo>
+                    <a:pt x="331538" y="1240590"/>
+                    <a:pt x="343852" y="1231300"/>
+                    <a:pt x="352927" y="1219200"/>
+                  </a:cubicBezTo>
+                  <a:cubicBezTo>
+                    <a:pt x="376063" y="1188352"/>
+                    <a:pt x="395706" y="1155032"/>
+                    <a:pt x="417095" y="1122948"/>
+                  </a:cubicBezTo>
+                  <a:cubicBezTo>
+                    <a:pt x="427790" y="1106906"/>
+                    <a:pt x="443082" y="1093112"/>
+                    <a:pt x="449179" y="1074821"/>
+                  </a:cubicBezTo>
+                  <a:cubicBezTo>
+                    <a:pt x="478594" y="986581"/>
+                    <a:pt x="447547" y="1065647"/>
+                    <a:pt x="497306" y="978569"/>
+                  </a:cubicBezTo>
+                  <a:cubicBezTo>
+                    <a:pt x="578718" y="836096"/>
+                    <a:pt x="483307" y="983525"/>
+                    <a:pt x="561474" y="866274"/>
+                  </a:cubicBezTo>
+                  <a:cubicBezTo>
+                    <a:pt x="585717" y="769303"/>
+                    <a:pt x="570547" y="823011"/>
+                    <a:pt x="609600" y="705853"/>
+                  </a:cubicBezTo>
+                  <a:cubicBezTo>
+                    <a:pt x="614947" y="689811"/>
+                    <a:pt x="613686" y="669684"/>
+                    <a:pt x="625643" y="657727"/>
+                  </a:cubicBezTo>
+                  <a:lnTo>
+                    <a:pt x="657727" y="625642"/>
+                  </a:lnTo>
+                  <a:cubicBezTo>
+                    <a:pt x="668567" y="560602"/>
+                    <a:pt x="671863" y="525047"/>
+                    <a:pt x="689811" y="465221"/>
+                  </a:cubicBezTo>
+                  <a:cubicBezTo>
+                    <a:pt x="699529" y="432828"/>
+                    <a:pt x="711200" y="401053"/>
+                    <a:pt x="721895" y="368969"/>
+                  </a:cubicBezTo>
+                  <a:lnTo>
+                    <a:pt x="737937" y="320842"/>
+                  </a:lnTo>
+                  <a:cubicBezTo>
+                    <a:pt x="737939" y="320837"/>
+                    <a:pt x="770019" y="224594"/>
+                    <a:pt x="770022" y="224590"/>
+                  </a:cubicBezTo>
+                  <a:cubicBezTo>
+                    <a:pt x="791411" y="192506"/>
+                    <a:pt x="821996" y="164919"/>
+                    <a:pt x="834190" y="128337"/>
+                  </a:cubicBezTo>
+                  <a:cubicBezTo>
+                    <a:pt x="839537" y="112295"/>
+                    <a:pt x="842670" y="95336"/>
+                    <a:pt x="850232" y="80211"/>
+                  </a:cubicBezTo>
+                  <a:cubicBezTo>
+                    <a:pt x="870468" y="39739"/>
+                    <a:pt x="884559" y="29842"/>
+                    <a:pt x="914400" y="0"/>
+                  </a:cubicBezTo>
+                  <a:cubicBezTo>
+                    <a:pt x="951832" y="5347"/>
+                    <a:pt x="996848" y="-7172"/>
+                    <a:pt x="1026695" y="16042"/>
+                  </a:cubicBezTo>
+                  <a:cubicBezTo>
+                    <a:pt x="1053391" y="36805"/>
+                    <a:pt x="1048084" y="80211"/>
+                    <a:pt x="1058779" y="112295"/>
+                  </a:cubicBezTo>
+                  <a:lnTo>
+                    <a:pt x="1106906" y="256674"/>
+                  </a:lnTo>
+                  <a:cubicBezTo>
+                    <a:pt x="1112253" y="272716"/>
+                    <a:pt x="1110991" y="292843"/>
+                    <a:pt x="1122948" y="304800"/>
+                  </a:cubicBezTo>
+                  <a:lnTo>
+                    <a:pt x="1155032" y="336885"/>
+                  </a:lnTo>
+                  <a:lnTo>
+                    <a:pt x="1203158" y="481264"/>
+                  </a:lnTo>
+                  <a:cubicBezTo>
+                    <a:pt x="1208505" y="497306"/>
+                    <a:pt x="1215099" y="512985"/>
+                    <a:pt x="1219200" y="529390"/>
+                  </a:cubicBezTo>
+                  <a:cubicBezTo>
+                    <a:pt x="1229895" y="572169"/>
+                    <a:pt x="1237341" y="615894"/>
+                    <a:pt x="1251285" y="657727"/>
+                  </a:cubicBezTo>
+                  <a:cubicBezTo>
+                    <a:pt x="1256632" y="673769"/>
+                    <a:pt x="1262682" y="689594"/>
+                    <a:pt x="1267327" y="705853"/>
+                  </a:cubicBezTo>
+                  <a:cubicBezTo>
+                    <a:pt x="1273384" y="727052"/>
+                    <a:pt x="1277312" y="748822"/>
+                    <a:pt x="1283369" y="770021"/>
+                  </a:cubicBezTo>
+                  <a:cubicBezTo>
+                    <a:pt x="1288015" y="786280"/>
+                    <a:pt x="1294765" y="801889"/>
+                    <a:pt x="1299411" y="818148"/>
+                  </a:cubicBezTo>
+                  <a:cubicBezTo>
+                    <a:pt x="1308135" y="848682"/>
+                    <a:pt x="1332289" y="963321"/>
+                    <a:pt x="1347537" y="978569"/>
+                  </a:cubicBezTo>
+                  <a:lnTo>
+                    <a:pt x="1379622" y="1010653"/>
+                  </a:lnTo>
+                  <a:cubicBezTo>
+                    <a:pt x="1390317" y="1042737"/>
+                    <a:pt x="1392946" y="1078766"/>
+                    <a:pt x="1411706" y="1106906"/>
+                  </a:cubicBezTo>
+                  <a:cubicBezTo>
+                    <a:pt x="1422401" y="1122948"/>
+                    <a:pt x="1435168" y="1137787"/>
+                    <a:pt x="1443790" y="1155032"/>
+                  </a:cubicBezTo>
+                  <a:cubicBezTo>
+                    <a:pt x="1451352" y="1170157"/>
+                    <a:pt x="1449686" y="1189630"/>
+                    <a:pt x="1459832" y="1203158"/>
+                  </a:cubicBezTo>
+                  <a:cubicBezTo>
+                    <a:pt x="1482519" y="1233407"/>
+                    <a:pt x="1519069" y="1251908"/>
+                    <a:pt x="1540043" y="1283369"/>
+                  </a:cubicBezTo>
+                  <a:cubicBezTo>
+                    <a:pt x="1569313" y="1327274"/>
+                    <a:pt x="1569594" y="1341064"/>
+                    <a:pt x="1620253" y="1363579"/>
+                  </a:cubicBezTo>
+                  <a:cubicBezTo>
+                    <a:pt x="1620260" y="1363582"/>
+                    <a:pt x="1740565" y="1403684"/>
+                    <a:pt x="1764632" y="1411706"/>
+                  </a:cubicBezTo>
+                  <a:cubicBezTo>
+                    <a:pt x="1819932" y="1430139"/>
+                    <a:pt x="1800801" y="1415791"/>
+                    <a:pt x="1828800" y="1443790"/>
+                  </a:cubicBezTo>
+                </a:path>
+              </a:pathLst>
+            </a:custGeom>
+            <a:noFill/>
+            <a:ln w="50800"/>
+          </p:spPr>
+          <p:style>
+            <a:lnRef idx="2">
+              <a:schemeClr val="accent1">
+                <a:shade val="50000"/>
+              </a:schemeClr>
+            </a:lnRef>
+            <a:fillRef idx="1">
+              <a:schemeClr val="accent1"/>
+            </a:fillRef>
+            <a:effectRef idx="0">
+              <a:schemeClr val="accent1"/>
+            </a:effectRef>
+            <a:fontRef idx="minor">
+              <a:schemeClr val="lt1"/>
+            </a:fontRef>
+          </p:style>
+          <p:txBody>
+            <a:bodyPr rtlCol="0" anchor="ctr"/>
+            <a:lstStyle/>
+            <a:p>
+              <a:pPr algn="ctr"/>
+              <a:endParaRPr lang="en-US"/>
+            </a:p>
+          </p:txBody>
+        </p:sp>
+        <p:sp>
+          <p:nvSpPr>
+            <p:cNvPr id="18" name="Freeform 17">
+              <a:extLst>
+                <a:ext uri="{FF2B5EF4-FFF2-40B4-BE49-F238E27FC236}">
+                  <a16:creationId xmlns:a16="http://schemas.microsoft.com/office/drawing/2014/main" id="{D80B9C3F-F4A9-7D4C-ADB2-9D091BB2DC2B}"/>
+                </a:ext>
+              </a:extLst>
+            </p:cNvPr>
+            <p:cNvSpPr/>
+            <p:nvPr/>
+          </p:nvSpPr>
+          <p:spPr>
+            <a:xfrm>
+              <a:off x="1149406" y="4550566"/>
+              <a:ext cx="1828800" cy="1443790"/>
+            </a:xfrm>
+            <a:custGeom>
+              <a:avLst/>
+              <a:gdLst>
+                <a:gd name="connsiteX0" fmla="*/ 0 w 1828800"/>
+                <a:gd name="connsiteY0" fmla="*/ 1443790 h 1443790"/>
+                <a:gd name="connsiteX1" fmla="*/ 112295 w 1828800"/>
+                <a:gd name="connsiteY1" fmla="*/ 1411706 h 1443790"/>
+                <a:gd name="connsiteX2" fmla="*/ 160422 w 1828800"/>
+                <a:gd name="connsiteY2" fmla="*/ 1395664 h 1443790"/>
+                <a:gd name="connsiteX3" fmla="*/ 256674 w 1828800"/>
+                <a:gd name="connsiteY3" fmla="*/ 1347537 h 1443790"/>
+                <a:gd name="connsiteX4" fmla="*/ 320843 w 1828800"/>
+                <a:gd name="connsiteY4" fmla="*/ 1251285 h 1443790"/>
+                <a:gd name="connsiteX5" fmla="*/ 352927 w 1828800"/>
+                <a:gd name="connsiteY5" fmla="*/ 1219200 h 1443790"/>
+                <a:gd name="connsiteX6" fmla="*/ 417095 w 1828800"/>
+                <a:gd name="connsiteY6" fmla="*/ 1122948 h 1443790"/>
+                <a:gd name="connsiteX7" fmla="*/ 449179 w 1828800"/>
+                <a:gd name="connsiteY7" fmla="*/ 1074821 h 1443790"/>
+                <a:gd name="connsiteX8" fmla="*/ 497306 w 1828800"/>
+                <a:gd name="connsiteY8" fmla="*/ 978569 h 1443790"/>
+                <a:gd name="connsiteX9" fmla="*/ 561474 w 1828800"/>
+                <a:gd name="connsiteY9" fmla="*/ 866274 h 1443790"/>
+                <a:gd name="connsiteX10" fmla="*/ 609600 w 1828800"/>
+                <a:gd name="connsiteY10" fmla="*/ 705853 h 1443790"/>
+                <a:gd name="connsiteX11" fmla="*/ 625643 w 1828800"/>
+                <a:gd name="connsiteY11" fmla="*/ 657727 h 1443790"/>
+                <a:gd name="connsiteX12" fmla="*/ 657727 w 1828800"/>
+                <a:gd name="connsiteY12" fmla="*/ 625642 h 1443790"/>
+                <a:gd name="connsiteX13" fmla="*/ 689811 w 1828800"/>
+                <a:gd name="connsiteY13" fmla="*/ 465221 h 1443790"/>
+                <a:gd name="connsiteX14" fmla="*/ 721895 w 1828800"/>
+                <a:gd name="connsiteY14" fmla="*/ 368969 h 1443790"/>
+                <a:gd name="connsiteX15" fmla="*/ 737937 w 1828800"/>
+                <a:gd name="connsiteY15" fmla="*/ 320842 h 1443790"/>
+                <a:gd name="connsiteX16" fmla="*/ 770022 w 1828800"/>
+                <a:gd name="connsiteY16" fmla="*/ 224590 h 1443790"/>
+                <a:gd name="connsiteX17" fmla="*/ 834190 w 1828800"/>
+                <a:gd name="connsiteY17" fmla="*/ 128337 h 1443790"/>
+                <a:gd name="connsiteX18" fmla="*/ 850232 w 1828800"/>
+                <a:gd name="connsiteY18" fmla="*/ 80211 h 1443790"/>
+                <a:gd name="connsiteX19" fmla="*/ 914400 w 1828800"/>
+                <a:gd name="connsiteY19" fmla="*/ 0 h 1443790"/>
+                <a:gd name="connsiteX20" fmla="*/ 1026695 w 1828800"/>
+                <a:gd name="connsiteY20" fmla="*/ 16042 h 1443790"/>
+                <a:gd name="connsiteX21" fmla="*/ 1058779 w 1828800"/>
+                <a:gd name="connsiteY21" fmla="*/ 112295 h 1443790"/>
+                <a:gd name="connsiteX22" fmla="*/ 1106906 w 1828800"/>
+                <a:gd name="connsiteY22" fmla="*/ 256674 h 1443790"/>
+                <a:gd name="connsiteX23" fmla="*/ 1122948 w 1828800"/>
+                <a:gd name="connsiteY23" fmla="*/ 304800 h 1443790"/>
+                <a:gd name="connsiteX24" fmla="*/ 1155032 w 1828800"/>
+                <a:gd name="connsiteY24" fmla="*/ 336885 h 1443790"/>
+                <a:gd name="connsiteX25" fmla="*/ 1203158 w 1828800"/>
+                <a:gd name="connsiteY25" fmla="*/ 481264 h 1443790"/>
+                <a:gd name="connsiteX26" fmla="*/ 1219200 w 1828800"/>
+                <a:gd name="connsiteY26" fmla="*/ 529390 h 1443790"/>
+                <a:gd name="connsiteX27" fmla="*/ 1251285 w 1828800"/>
+                <a:gd name="connsiteY27" fmla="*/ 657727 h 1443790"/>
+                <a:gd name="connsiteX28" fmla="*/ 1267327 w 1828800"/>
+                <a:gd name="connsiteY28" fmla="*/ 705853 h 1443790"/>
+                <a:gd name="connsiteX29" fmla="*/ 1283369 w 1828800"/>
+                <a:gd name="connsiteY29" fmla="*/ 770021 h 1443790"/>
+                <a:gd name="connsiteX30" fmla="*/ 1299411 w 1828800"/>
+                <a:gd name="connsiteY30" fmla="*/ 818148 h 1443790"/>
+                <a:gd name="connsiteX31" fmla="*/ 1347537 w 1828800"/>
+                <a:gd name="connsiteY31" fmla="*/ 978569 h 1443790"/>
+                <a:gd name="connsiteX32" fmla="*/ 1379622 w 1828800"/>
+                <a:gd name="connsiteY32" fmla="*/ 1010653 h 1443790"/>
+                <a:gd name="connsiteX33" fmla="*/ 1411706 w 1828800"/>
+                <a:gd name="connsiteY33" fmla="*/ 1106906 h 1443790"/>
+                <a:gd name="connsiteX34" fmla="*/ 1443790 w 1828800"/>
+                <a:gd name="connsiteY34" fmla="*/ 1155032 h 1443790"/>
+                <a:gd name="connsiteX35" fmla="*/ 1459832 w 1828800"/>
+                <a:gd name="connsiteY35" fmla="*/ 1203158 h 1443790"/>
+                <a:gd name="connsiteX36" fmla="*/ 1540043 w 1828800"/>
+                <a:gd name="connsiteY36" fmla="*/ 1283369 h 1443790"/>
+                <a:gd name="connsiteX37" fmla="*/ 1620253 w 1828800"/>
+                <a:gd name="connsiteY37" fmla="*/ 1363579 h 1443790"/>
+                <a:gd name="connsiteX38" fmla="*/ 1764632 w 1828800"/>
+                <a:gd name="connsiteY38" fmla="*/ 1411706 h 1443790"/>
+                <a:gd name="connsiteX39" fmla="*/ 1828800 w 1828800"/>
+                <a:gd name="connsiteY39" fmla="*/ 1443790 h 1443790"/>
+              </a:gdLst>
+              <a:ahLst/>
+              <a:cxnLst>
+                <a:cxn ang="0">
+                  <a:pos x="connsiteX0" y="connsiteY0"/>
+                </a:cxn>
+                <a:cxn ang="0">
+                  <a:pos x="connsiteX1" y="connsiteY1"/>
+                </a:cxn>
+                <a:cxn ang="0">
+                  <a:pos x="connsiteX2" y="connsiteY2"/>
+                </a:cxn>
+                <a:cxn ang="0">
+                  <a:pos x="connsiteX3" y="connsiteY3"/>
+                </a:cxn>
+                <a:cxn ang="0">
+                  <a:pos x="connsiteX4" y="connsiteY4"/>
+                </a:cxn>
+                <a:cxn ang="0">
+                  <a:pos x="connsiteX5" y="connsiteY5"/>
+                </a:cxn>
+                <a:cxn ang="0">
+                  <a:pos x="connsiteX6" y="connsiteY6"/>
+                </a:cxn>
+                <a:cxn ang="0">
+                  <a:pos x="connsiteX7" y="connsiteY7"/>
+                </a:cxn>
+                <a:cxn ang="0">
+                  <a:pos x="connsiteX8" y="connsiteY8"/>
+                </a:cxn>
+                <a:cxn ang="0">
+                  <a:pos x="connsiteX9" y="connsiteY9"/>
+                </a:cxn>
+                <a:cxn ang="0">
+                  <a:pos x="connsiteX10" y="connsiteY10"/>
+                </a:cxn>
+                <a:cxn ang="0">
+                  <a:pos x="connsiteX11" y="connsiteY11"/>
+                </a:cxn>
+                <a:cxn ang="0">
+                  <a:pos x="connsiteX12" y="connsiteY12"/>
+                </a:cxn>
+                <a:cxn ang="0">
+                  <a:pos x="connsiteX13" y="connsiteY13"/>
+                </a:cxn>
+                <a:cxn ang="0">
+                  <a:pos x="connsiteX14" y="connsiteY14"/>
+                </a:cxn>
+                <a:cxn ang="0">
+                  <a:pos x="connsiteX15" y="connsiteY15"/>
+                </a:cxn>
+                <a:cxn ang="0">
+                  <a:pos x="connsiteX16" y="connsiteY16"/>
+                </a:cxn>
+                <a:cxn ang="0">
+                  <a:pos x="connsiteX17" y="connsiteY17"/>
+                </a:cxn>
+                <a:cxn ang="0">
+                  <a:pos x="connsiteX18" y="connsiteY18"/>
+                </a:cxn>
+                <a:cxn ang="0">
+                  <a:pos x="connsiteX19" y="connsiteY19"/>
+                </a:cxn>
+                <a:cxn ang="0">
+                  <a:pos x="connsiteX20" y="connsiteY20"/>
+                </a:cxn>
+                <a:cxn ang="0">
+                  <a:pos x="connsiteX21" y="connsiteY21"/>
+                </a:cxn>
+                <a:cxn ang="0">
+                  <a:pos x="connsiteX22" y="connsiteY22"/>
+                </a:cxn>
+                <a:cxn ang="0">
+                  <a:pos x="connsiteX23" y="connsiteY23"/>
+                </a:cxn>
+                <a:cxn ang="0">
+                  <a:pos x="connsiteX24" y="connsiteY24"/>
+                </a:cxn>
+                <a:cxn ang="0">
+                  <a:pos x="connsiteX25" y="connsiteY25"/>
+                </a:cxn>
+                <a:cxn ang="0">
+                  <a:pos x="connsiteX26" y="connsiteY26"/>
+                </a:cxn>
+                <a:cxn ang="0">
+                  <a:pos x="connsiteX27" y="connsiteY27"/>
+                </a:cxn>
+                <a:cxn ang="0">
+                  <a:pos x="connsiteX28" y="connsiteY28"/>
+                </a:cxn>
+                <a:cxn ang="0">
+                  <a:pos x="connsiteX29" y="connsiteY29"/>
+                </a:cxn>
+                <a:cxn ang="0">
+                  <a:pos x="connsiteX30" y="connsiteY30"/>
+                </a:cxn>
+                <a:cxn ang="0">
+                  <a:pos x="connsiteX31" y="connsiteY31"/>
+                </a:cxn>
+                <a:cxn ang="0">
+                  <a:pos x="connsiteX32" y="connsiteY32"/>
+                </a:cxn>
+                <a:cxn ang="0">
+                  <a:pos x="connsiteX33" y="connsiteY33"/>
+                </a:cxn>
+                <a:cxn ang="0">
+                  <a:pos x="connsiteX34" y="connsiteY34"/>
+                </a:cxn>
+                <a:cxn ang="0">
+                  <a:pos x="connsiteX35" y="connsiteY35"/>
+                </a:cxn>
+                <a:cxn ang="0">
+                  <a:pos x="connsiteX36" y="connsiteY36"/>
+                </a:cxn>
+                <a:cxn ang="0">
+                  <a:pos x="connsiteX37" y="connsiteY37"/>
+                </a:cxn>
+                <a:cxn ang="0">
+                  <a:pos x="connsiteX38" y="connsiteY38"/>
+                </a:cxn>
+                <a:cxn ang="0">
+                  <a:pos x="connsiteX39" y="connsiteY39"/>
+                </a:cxn>
+              </a:cxnLst>
+              <a:rect l="l" t="t" r="r" b="b"/>
+              <a:pathLst>
+                <a:path w="1828800" h="1443790">
+                  <a:moveTo>
+                    <a:pt x="0" y="1443790"/>
+                  </a:moveTo>
+                  <a:lnTo>
+                    <a:pt x="112295" y="1411706"/>
+                  </a:lnTo>
+                  <a:cubicBezTo>
+                    <a:pt x="128492" y="1406847"/>
+                    <a:pt x="145297" y="1403226"/>
+                    <a:pt x="160422" y="1395664"/>
+                  </a:cubicBezTo>
+                  <a:cubicBezTo>
+                    <a:pt x="284817" y="1333466"/>
+                    <a:pt x="135705" y="1387860"/>
+                    <a:pt x="256674" y="1347537"/>
+                  </a:cubicBezTo>
+                  <a:cubicBezTo>
+                    <a:pt x="278064" y="1315453"/>
+                    <a:pt x="293577" y="1278552"/>
+                    <a:pt x="320843" y="1251285"/>
+                  </a:cubicBezTo>
+                  <a:cubicBezTo>
+                    <a:pt x="331538" y="1240590"/>
+                    <a:pt x="343852" y="1231300"/>
+                    <a:pt x="352927" y="1219200"/>
+                  </a:cubicBezTo>
+                  <a:cubicBezTo>
+                    <a:pt x="376063" y="1188352"/>
+                    <a:pt x="395706" y="1155032"/>
+                    <a:pt x="417095" y="1122948"/>
+                  </a:cubicBezTo>
+                  <a:cubicBezTo>
+                    <a:pt x="427790" y="1106906"/>
+                    <a:pt x="443082" y="1093112"/>
+                    <a:pt x="449179" y="1074821"/>
+                  </a:cubicBezTo>
+                  <a:cubicBezTo>
+                    <a:pt x="478594" y="986581"/>
+                    <a:pt x="447547" y="1065647"/>
+                    <a:pt x="497306" y="978569"/>
+                  </a:cubicBezTo>
+                  <a:cubicBezTo>
+                    <a:pt x="578718" y="836096"/>
+                    <a:pt x="483307" y="983525"/>
+                    <a:pt x="561474" y="866274"/>
+                  </a:cubicBezTo>
+                  <a:cubicBezTo>
+                    <a:pt x="585717" y="769303"/>
+                    <a:pt x="570547" y="823011"/>
+                    <a:pt x="609600" y="705853"/>
+                  </a:cubicBezTo>
+                  <a:cubicBezTo>
+                    <a:pt x="614947" y="689811"/>
+                    <a:pt x="613686" y="669684"/>
+                    <a:pt x="625643" y="657727"/>
+                  </a:cubicBezTo>
+                  <a:lnTo>
+                    <a:pt x="657727" y="625642"/>
+                  </a:lnTo>
+                  <a:cubicBezTo>
+                    <a:pt x="668567" y="560602"/>
+                    <a:pt x="671863" y="525047"/>
+                    <a:pt x="689811" y="465221"/>
+                  </a:cubicBezTo>
+                  <a:cubicBezTo>
+                    <a:pt x="699529" y="432828"/>
+                    <a:pt x="711200" y="401053"/>
+                    <a:pt x="721895" y="368969"/>
+                  </a:cubicBezTo>
+                  <a:lnTo>
+                    <a:pt x="737937" y="320842"/>
+                  </a:lnTo>
+                  <a:cubicBezTo>
+                    <a:pt x="737939" y="320837"/>
+                    <a:pt x="770019" y="224594"/>
+                    <a:pt x="770022" y="224590"/>
+                  </a:cubicBezTo>
+                  <a:cubicBezTo>
+                    <a:pt x="791411" y="192506"/>
+                    <a:pt x="821996" y="164919"/>
+                    <a:pt x="834190" y="128337"/>
+                  </a:cubicBezTo>
+                  <a:cubicBezTo>
+                    <a:pt x="839537" y="112295"/>
+                    <a:pt x="842670" y="95336"/>
+                    <a:pt x="850232" y="80211"/>
+                  </a:cubicBezTo>
+                  <a:cubicBezTo>
+                    <a:pt x="870468" y="39739"/>
+                    <a:pt x="884559" y="29842"/>
+                    <a:pt x="914400" y="0"/>
+                  </a:cubicBezTo>
+                  <a:cubicBezTo>
+                    <a:pt x="951832" y="5347"/>
+                    <a:pt x="996848" y="-7172"/>
+                    <a:pt x="1026695" y="16042"/>
+                  </a:cubicBezTo>
+                  <a:cubicBezTo>
+                    <a:pt x="1053391" y="36805"/>
+                    <a:pt x="1048084" y="80211"/>
+                    <a:pt x="1058779" y="112295"/>
+                  </a:cubicBezTo>
+                  <a:lnTo>
+                    <a:pt x="1106906" y="256674"/>
+                  </a:lnTo>
+                  <a:cubicBezTo>
+                    <a:pt x="1112253" y="272716"/>
+                    <a:pt x="1110991" y="292843"/>
+                    <a:pt x="1122948" y="304800"/>
+                  </a:cubicBezTo>
+                  <a:lnTo>
+                    <a:pt x="1155032" y="336885"/>
+                  </a:lnTo>
+                  <a:lnTo>
+                    <a:pt x="1203158" y="481264"/>
+                  </a:lnTo>
+                  <a:cubicBezTo>
+                    <a:pt x="1208505" y="497306"/>
+                    <a:pt x="1215099" y="512985"/>
+                    <a:pt x="1219200" y="529390"/>
+                  </a:cubicBezTo>
+                  <a:cubicBezTo>
+                    <a:pt x="1229895" y="572169"/>
+                    <a:pt x="1237341" y="615894"/>
+                    <a:pt x="1251285" y="657727"/>
+                  </a:cubicBezTo>
+                  <a:cubicBezTo>
+                    <a:pt x="1256632" y="673769"/>
+                    <a:pt x="1262682" y="689594"/>
+                    <a:pt x="1267327" y="705853"/>
+                  </a:cubicBezTo>
+                  <a:cubicBezTo>
+                    <a:pt x="1273384" y="727052"/>
+                    <a:pt x="1277312" y="748822"/>
+                    <a:pt x="1283369" y="770021"/>
+                  </a:cubicBezTo>
+                  <a:cubicBezTo>
+                    <a:pt x="1288015" y="786280"/>
+                    <a:pt x="1294765" y="801889"/>
+                    <a:pt x="1299411" y="818148"/>
+                  </a:cubicBezTo>
+                  <a:cubicBezTo>
+                    <a:pt x="1308135" y="848682"/>
+                    <a:pt x="1332289" y="963321"/>
+                    <a:pt x="1347537" y="978569"/>
+                  </a:cubicBezTo>
+                  <a:lnTo>
+                    <a:pt x="1379622" y="1010653"/>
+                  </a:lnTo>
+                  <a:cubicBezTo>
+                    <a:pt x="1390317" y="1042737"/>
+                    <a:pt x="1392946" y="1078766"/>
+                    <a:pt x="1411706" y="1106906"/>
+                  </a:cubicBezTo>
+                  <a:cubicBezTo>
+                    <a:pt x="1422401" y="1122948"/>
+                    <a:pt x="1435168" y="1137787"/>
+                    <a:pt x="1443790" y="1155032"/>
+                  </a:cubicBezTo>
+                  <a:cubicBezTo>
+                    <a:pt x="1451352" y="1170157"/>
+                    <a:pt x="1449686" y="1189630"/>
+                    <a:pt x="1459832" y="1203158"/>
+                  </a:cubicBezTo>
+                  <a:cubicBezTo>
+                    <a:pt x="1482519" y="1233407"/>
+                    <a:pt x="1519069" y="1251908"/>
+                    <a:pt x="1540043" y="1283369"/>
+                  </a:cubicBezTo>
+                  <a:cubicBezTo>
+                    <a:pt x="1569313" y="1327274"/>
+                    <a:pt x="1569594" y="1341064"/>
+                    <a:pt x="1620253" y="1363579"/>
+                  </a:cubicBezTo>
+                  <a:cubicBezTo>
+                    <a:pt x="1620260" y="1363582"/>
+                    <a:pt x="1740565" y="1403684"/>
+                    <a:pt x="1764632" y="1411706"/>
+                  </a:cubicBezTo>
+                  <a:cubicBezTo>
+                    <a:pt x="1819932" y="1430139"/>
+                    <a:pt x="1800801" y="1415791"/>
+                    <a:pt x="1828800" y="1443790"/>
+                  </a:cubicBezTo>
+                </a:path>
+              </a:pathLst>
+            </a:custGeom>
+            <a:noFill/>
+            <a:ln w="50800"/>
+          </p:spPr>
+          <p:style>
+            <a:lnRef idx="2">
+              <a:schemeClr val="accent1">
+                <a:shade val="50000"/>
+              </a:schemeClr>
+            </a:lnRef>
+            <a:fillRef idx="1">
+              <a:schemeClr val="accent1"/>
+            </a:fillRef>
+            <a:effectRef idx="0">
+              <a:schemeClr val="accent1"/>
+            </a:effectRef>
+            <a:fontRef idx="minor">
+              <a:schemeClr val="lt1"/>
+            </a:fontRef>
+          </p:style>
+          <p:txBody>
+            <a:bodyPr rtlCol="0" anchor="ctr"/>
+            <a:lstStyle/>
+            <a:p>
+              <a:pPr algn="ctr"/>
+              <a:endParaRPr lang="en-US"/>
+            </a:p>
+          </p:txBody>
+        </p:sp>
+        <p:sp>
+          <p:nvSpPr>
+            <p:cNvPr id="19" name="Freeform 18">
+              <a:extLst>
+                <a:ext uri="{FF2B5EF4-FFF2-40B4-BE49-F238E27FC236}">
+                  <a16:creationId xmlns:a16="http://schemas.microsoft.com/office/drawing/2014/main" id="{A51D2DD2-90FA-2143-BA9F-54FC5BE044BE}"/>
+                </a:ext>
+              </a:extLst>
+            </p:cNvPr>
+            <p:cNvSpPr/>
+            <p:nvPr/>
+          </p:nvSpPr>
+          <p:spPr>
+            <a:xfrm>
+              <a:off x="1328104" y="4550566"/>
+              <a:ext cx="323238" cy="1443790"/>
+            </a:xfrm>
+            <a:custGeom>
+              <a:avLst/>
+              <a:gdLst>
+                <a:gd name="connsiteX0" fmla="*/ 0 w 1828800"/>
+                <a:gd name="connsiteY0" fmla="*/ 1443790 h 1443790"/>
+                <a:gd name="connsiteX1" fmla="*/ 112295 w 1828800"/>
+                <a:gd name="connsiteY1" fmla="*/ 1411706 h 1443790"/>
+                <a:gd name="connsiteX2" fmla="*/ 160422 w 1828800"/>
+                <a:gd name="connsiteY2" fmla="*/ 1395664 h 1443790"/>
+                <a:gd name="connsiteX3" fmla="*/ 256674 w 1828800"/>
+                <a:gd name="connsiteY3" fmla="*/ 1347537 h 1443790"/>
+                <a:gd name="connsiteX4" fmla="*/ 320843 w 1828800"/>
+                <a:gd name="connsiteY4" fmla="*/ 1251285 h 1443790"/>
+                <a:gd name="connsiteX5" fmla="*/ 352927 w 1828800"/>
+                <a:gd name="connsiteY5" fmla="*/ 1219200 h 1443790"/>
+                <a:gd name="connsiteX6" fmla="*/ 417095 w 1828800"/>
+                <a:gd name="connsiteY6" fmla="*/ 1122948 h 1443790"/>
+                <a:gd name="connsiteX7" fmla="*/ 449179 w 1828800"/>
+                <a:gd name="connsiteY7" fmla="*/ 1074821 h 1443790"/>
+                <a:gd name="connsiteX8" fmla="*/ 497306 w 1828800"/>
+                <a:gd name="connsiteY8" fmla="*/ 978569 h 1443790"/>
+                <a:gd name="connsiteX9" fmla="*/ 561474 w 1828800"/>
+                <a:gd name="connsiteY9" fmla="*/ 866274 h 1443790"/>
+                <a:gd name="connsiteX10" fmla="*/ 609600 w 1828800"/>
+                <a:gd name="connsiteY10" fmla="*/ 705853 h 1443790"/>
+                <a:gd name="connsiteX11" fmla="*/ 625643 w 1828800"/>
+                <a:gd name="connsiteY11" fmla="*/ 657727 h 1443790"/>
+                <a:gd name="connsiteX12" fmla="*/ 657727 w 1828800"/>
+                <a:gd name="connsiteY12" fmla="*/ 625642 h 1443790"/>
+                <a:gd name="connsiteX13" fmla="*/ 689811 w 1828800"/>
+                <a:gd name="connsiteY13" fmla="*/ 465221 h 1443790"/>
+                <a:gd name="connsiteX14" fmla="*/ 721895 w 1828800"/>
+                <a:gd name="connsiteY14" fmla="*/ 368969 h 1443790"/>
+                <a:gd name="connsiteX15" fmla="*/ 737937 w 1828800"/>
+                <a:gd name="connsiteY15" fmla="*/ 320842 h 1443790"/>
+                <a:gd name="connsiteX16" fmla="*/ 770022 w 1828800"/>
+                <a:gd name="connsiteY16" fmla="*/ 224590 h 1443790"/>
+                <a:gd name="connsiteX17" fmla="*/ 834190 w 1828800"/>
+                <a:gd name="connsiteY17" fmla="*/ 128337 h 1443790"/>
+                <a:gd name="connsiteX18" fmla="*/ 850232 w 1828800"/>
+                <a:gd name="connsiteY18" fmla="*/ 80211 h 1443790"/>
+                <a:gd name="connsiteX19" fmla="*/ 914400 w 1828800"/>
+                <a:gd name="connsiteY19" fmla="*/ 0 h 1443790"/>
+                <a:gd name="connsiteX20" fmla="*/ 1026695 w 1828800"/>
+                <a:gd name="connsiteY20" fmla="*/ 16042 h 1443790"/>
+                <a:gd name="connsiteX21" fmla="*/ 1058779 w 1828800"/>
+                <a:gd name="connsiteY21" fmla="*/ 112295 h 1443790"/>
+                <a:gd name="connsiteX22" fmla="*/ 1106906 w 1828800"/>
+                <a:gd name="connsiteY22" fmla="*/ 256674 h 1443790"/>
+                <a:gd name="connsiteX23" fmla="*/ 1122948 w 1828800"/>
+                <a:gd name="connsiteY23" fmla="*/ 304800 h 1443790"/>
+                <a:gd name="connsiteX24" fmla="*/ 1155032 w 1828800"/>
+                <a:gd name="connsiteY24" fmla="*/ 336885 h 1443790"/>
+                <a:gd name="connsiteX25" fmla="*/ 1203158 w 1828800"/>
+                <a:gd name="connsiteY25" fmla="*/ 481264 h 1443790"/>
+                <a:gd name="connsiteX26" fmla="*/ 1219200 w 1828800"/>
+                <a:gd name="connsiteY26" fmla="*/ 529390 h 1443790"/>
+                <a:gd name="connsiteX27" fmla="*/ 1251285 w 1828800"/>
+                <a:gd name="connsiteY27" fmla="*/ 657727 h 1443790"/>
+                <a:gd name="connsiteX28" fmla="*/ 1267327 w 1828800"/>
+                <a:gd name="connsiteY28" fmla="*/ 705853 h 1443790"/>
+                <a:gd name="connsiteX29" fmla="*/ 1283369 w 1828800"/>
+                <a:gd name="connsiteY29" fmla="*/ 770021 h 1443790"/>
+                <a:gd name="connsiteX30" fmla="*/ 1299411 w 1828800"/>
+                <a:gd name="connsiteY30" fmla="*/ 818148 h 1443790"/>
+                <a:gd name="connsiteX31" fmla="*/ 1347537 w 1828800"/>
+                <a:gd name="connsiteY31" fmla="*/ 978569 h 1443790"/>
+                <a:gd name="connsiteX32" fmla="*/ 1379622 w 1828800"/>
+                <a:gd name="connsiteY32" fmla="*/ 1010653 h 1443790"/>
+                <a:gd name="connsiteX33" fmla="*/ 1411706 w 1828800"/>
+                <a:gd name="connsiteY33" fmla="*/ 1106906 h 1443790"/>
+                <a:gd name="connsiteX34" fmla="*/ 1443790 w 1828800"/>
+                <a:gd name="connsiteY34" fmla="*/ 1155032 h 1443790"/>
+                <a:gd name="connsiteX35" fmla="*/ 1459832 w 1828800"/>
+                <a:gd name="connsiteY35" fmla="*/ 1203158 h 1443790"/>
+                <a:gd name="connsiteX36" fmla="*/ 1540043 w 1828800"/>
+                <a:gd name="connsiteY36" fmla="*/ 1283369 h 1443790"/>
+                <a:gd name="connsiteX37" fmla="*/ 1620253 w 1828800"/>
+                <a:gd name="connsiteY37" fmla="*/ 1363579 h 1443790"/>
+                <a:gd name="connsiteX38" fmla="*/ 1764632 w 1828800"/>
+                <a:gd name="connsiteY38" fmla="*/ 1411706 h 1443790"/>
+                <a:gd name="connsiteX39" fmla="*/ 1828800 w 1828800"/>
+                <a:gd name="connsiteY39" fmla="*/ 1443790 h 1443790"/>
+              </a:gdLst>
+              <a:ahLst/>
+              <a:cxnLst>
+                <a:cxn ang="0">
+                  <a:pos x="connsiteX0" y="connsiteY0"/>
+                </a:cxn>
+                <a:cxn ang="0">
+                  <a:pos x="connsiteX1" y="connsiteY1"/>
+                </a:cxn>
+                <a:cxn ang="0">
+                  <a:pos x="connsiteX2" y="connsiteY2"/>
+                </a:cxn>
+                <a:cxn ang="0">
+                  <a:pos x="connsiteX3" y="connsiteY3"/>
+                </a:cxn>
+                <a:cxn ang="0">
+                  <a:pos x="connsiteX4" y="connsiteY4"/>
+                </a:cxn>
+                <a:cxn ang="0">
+                  <a:pos x="connsiteX5" y="connsiteY5"/>
+                </a:cxn>
+                <a:cxn ang="0">
+                  <a:pos x="connsiteX6" y="connsiteY6"/>
+                </a:cxn>
+                <a:cxn ang="0">
+                  <a:pos x="connsiteX7" y="connsiteY7"/>
+                </a:cxn>
+                <a:cxn ang="0">
+                  <a:pos x="connsiteX8" y="connsiteY8"/>
+                </a:cxn>
+                <a:cxn ang="0">
+                  <a:pos x="connsiteX9" y="connsiteY9"/>
+                </a:cxn>
+                <a:cxn ang="0">
+                  <a:pos x="connsiteX10" y="connsiteY10"/>
+                </a:cxn>
+                <a:cxn ang="0">
+                  <a:pos x="connsiteX11" y="connsiteY11"/>
+                </a:cxn>
+                <a:cxn ang="0">
+                  <a:pos x="connsiteX12" y="connsiteY12"/>
+                </a:cxn>
+                <a:cxn ang="0">
+                  <a:pos x="connsiteX13" y="connsiteY13"/>
+                </a:cxn>
+                <a:cxn ang="0">
+                  <a:pos x="connsiteX14" y="connsiteY14"/>
+                </a:cxn>
+                <a:cxn ang="0">
+                  <a:pos x="connsiteX15" y="connsiteY15"/>
+                </a:cxn>
+                <a:cxn ang="0">
+                  <a:pos x="connsiteX16" y="connsiteY16"/>
+                </a:cxn>
+                <a:cxn ang="0">
+                  <a:pos x="connsiteX17" y="connsiteY17"/>
+                </a:cxn>
+                <a:cxn ang="0">
+                  <a:pos x="connsiteX18" y="connsiteY18"/>
+                </a:cxn>
+                <a:cxn ang="0">
+                  <a:pos x="connsiteX19" y="connsiteY19"/>
+                </a:cxn>
+                <a:cxn ang="0">
+                  <a:pos x="connsiteX20" y="connsiteY20"/>
+                </a:cxn>
+                <a:cxn ang="0">
+                  <a:pos x="connsiteX21" y="connsiteY21"/>
+                </a:cxn>
+                <a:cxn ang="0">
+                  <a:pos x="connsiteX22" y="connsiteY22"/>
+                </a:cxn>
+                <a:cxn ang="0">
+                  <a:pos x="connsiteX23" y="connsiteY23"/>
+                </a:cxn>
+                <a:cxn ang="0">
+                  <a:pos x="connsiteX24" y="connsiteY24"/>
+                </a:cxn>
+                <a:cxn ang="0">
+                  <a:pos x="connsiteX25" y="connsiteY25"/>
+                </a:cxn>
+                <a:cxn ang="0">
+                  <a:pos x="connsiteX26" y="connsiteY26"/>
+                </a:cxn>
+                <a:cxn ang="0">
+                  <a:pos x="connsiteX27" y="connsiteY27"/>
+                </a:cxn>
+                <a:cxn ang="0">
+                  <a:pos x="connsiteX28" y="connsiteY28"/>
+                </a:cxn>
+                <a:cxn ang="0">
+                  <a:pos x="connsiteX29" y="connsiteY29"/>
+                </a:cxn>
+                <a:cxn ang="0">
+                  <a:pos x="connsiteX30" y="connsiteY30"/>
+                </a:cxn>
+                <a:cxn ang="0">
+                  <a:pos x="connsiteX31" y="connsiteY31"/>
+                </a:cxn>
+                <a:cxn ang="0">
+                  <a:pos x="connsiteX32" y="connsiteY32"/>
+                </a:cxn>
+                <a:cxn ang="0">
+                  <a:pos x="connsiteX33" y="connsiteY33"/>
+                </a:cxn>
+                <a:cxn ang="0">
+                  <a:pos x="connsiteX34" y="connsiteY34"/>
+                </a:cxn>
+                <a:cxn ang="0">
+                  <a:pos x="connsiteX35" y="connsiteY35"/>
+                </a:cxn>
+                <a:cxn ang="0">
+                  <a:pos x="connsiteX36" y="connsiteY36"/>
+                </a:cxn>
+                <a:cxn ang="0">
+                  <a:pos x="connsiteX37" y="connsiteY37"/>
+                </a:cxn>
+                <a:cxn ang="0">
+                  <a:pos x="connsiteX38" y="connsiteY38"/>
+                </a:cxn>
+                <a:cxn ang="0">
+                  <a:pos x="connsiteX39" y="connsiteY39"/>
+                </a:cxn>
+              </a:cxnLst>
+              <a:rect l="l" t="t" r="r" b="b"/>
+              <a:pathLst>
+                <a:path w="1828800" h="1443790">
+                  <a:moveTo>
+                    <a:pt x="0" y="1443790"/>
+                  </a:moveTo>
+                  <a:lnTo>
+                    <a:pt x="112295" y="1411706"/>
+                  </a:lnTo>
+                  <a:cubicBezTo>
+                    <a:pt x="128492" y="1406847"/>
+                    <a:pt x="145297" y="1403226"/>
+                    <a:pt x="160422" y="1395664"/>
+                  </a:cubicBezTo>
+                  <a:cubicBezTo>
+                    <a:pt x="284817" y="1333466"/>
+                    <a:pt x="135705" y="1387860"/>
+                    <a:pt x="256674" y="1347537"/>
+                  </a:cubicBezTo>
+                  <a:cubicBezTo>
+                    <a:pt x="278064" y="1315453"/>
+                    <a:pt x="293577" y="1278552"/>
+                    <a:pt x="320843" y="1251285"/>
+                  </a:cubicBezTo>
+                  <a:cubicBezTo>
+                    <a:pt x="331538" y="1240590"/>
+                    <a:pt x="343852" y="1231300"/>
+                    <a:pt x="352927" y="1219200"/>
+                  </a:cubicBezTo>
+                  <a:cubicBezTo>
+                    <a:pt x="376063" y="1188352"/>
+                    <a:pt x="395706" y="1155032"/>
+                    <a:pt x="417095" y="1122948"/>
+                  </a:cubicBezTo>
+                  <a:cubicBezTo>
+                    <a:pt x="427790" y="1106906"/>
+                    <a:pt x="443082" y="1093112"/>
+                    <a:pt x="449179" y="1074821"/>
+                  </a:cubicBezTo>
+                  <a:cubicBezTo>
+                    <a:pt x="478594" y="986581"/>
+                    <a:pt x="447547" y="1065647"/>
+                    <a:pt x="497306" y="978569"/>
+                  </a:cubicBezTo>
+                  <a:cubicBezTo>
+                    <a:pt x="578718" y="836096"/>
+                    <a:pt x="483307" y="983525"/>
+                    <a:pt x="561474" y="866274"/>
+                  </a:cubicBezTo>
+                  <a:cubicBezTo>
+                    <a:pt x="585717" y="769303"/>
+                    <a:pt x="570547" y="823011"/>
+                    <a:pt x="609600" y="705853"/>
+                  </a:cubicBezTo>
+                  <a:cubicBezTo>
+                    <a:pt x="614947" y="689811"/>
+                    <a:pt x="613686" y="669684"/>
+                    <a:pt x="625643" y="657727"/>
+                  </a:cubicBezTo>
+                  <a:lnTo>
+                    <a:pt x="657727" y="625642"/>
+                  </a:lnTo>
+                  <a:cubicBezTo>
+                    <a:pt x="668567" y="560602"/>
+                    <a:pt x="671863" y="525047"/>
+                    <a:pt x="689811" y="465221"/>
+                  </a:cubicBezTo>
+                  <a:cubicBezTo>
+                    <a:pt x="699529" y="432828"/>
+                    <a:pt x="711200" y="401053"/>
+                    <a:pt x="721895" y="368969"/>
+                  </a:cubicBezTo>
+                  <a:lnTo>
+                    <a:pt x="737937" y="320842"/>
+                  </a:lnTo>
+                  <a:cubicBezTo>
+                    <a:pt x="737939" y="320837"/>
+                    <a:pt x="770019" y="224594"/>
+                    <a:pt x="770022" y="224590"/>
+                  </a:cubicBezTo>
+                  <a:cubicBezTo>
+                    <a:pt x="791411" y="192506"/>
+                    <a:pt x="821996" y="164919"/>
+                    <a:pt x="834190" y="128337"/>
+                  </a:cubicBezTo>
+                  <a:cubicBezTo>
+                    <a:pt x="839537" y="112295"/>
+                    <a:pt x="842670" y="95336"/>
+                    <a:pt x="850232" y="80211"/>
+                  </a:cubicBezTo>
+                  <a:cubicBezTo>
+                    <a:pt x="870468" y="39739"/>
+                    <a:pt x="884559" y="29842"/>
+                    <a:pt x="914400" y="0"/>
+                  </a:cubicBezTo>
+                  <a:cubicBezTo>
+                    <a:pt x="951832" y="5347"/>
+                    <a:pt x="996848" y="-7172"/>
+                    <a:pt x="1026695" y="16042"/>
+                  </a:cubicBezTo>
+                  <a:cubicBezTo>
+                    <a:pt x="1053391" y="36805"/>
+                    <a:pt x="1048084" y="80211"/>
+                    <a:pt x="1058779" y="112295"/>
+                  </a:cubicBezTo>
+                  <a:lnTo>
+                    <a:pt x="1106906" y="256674"/>
+                  </a:lnTo>
+                  <a:cubicBezTo>
+                    <a:pt x="1112253" y="272716"/>
+                    <a:pt x="1110991" y="292843"/>
+                    <a:pt x="1122948" y="304800"/>
+                  </a:cubicBezTo>
+                  <a:lnTo>
+                    <a:pt x="1155032" y="336885"/>
+                  </a:lnTo>
+                  <a:lnTo>
+                    <a:pt x="1203158" y="481264"/>
+                  </a:lnTo>
+                  <a:cubicBezTo>
+                    <a:pt x="1208505" y="497306"/>
+                    <a:pt x="1215099" y="512985"/>
+                    <a:pt x="1219200" y="529390"/>
+                  </a:cubicBezTo>
+                  <a:cubicBezTo>
+                    <a:pt x="1229895" y="572169"/>
+                    <a:pt x="1237341" y="615894"/>
+                    <a:pt x="1251285" y="657727"/>
+                  </a:cubicBezTo>
+                  <a:cubicBezTo>
+                    <a:pt x="1256632" y="673769"/>
+                    <a:pt x="1262682" y="689594"/>
+                    <a:pt x="1267327" y="705853"/>
+                  </a:cubicBezTo>
+                  <a:cubicBezTo>
+                    <a:pt x="1273384" y="727052"/>
+                    <a:pt x="1277312" y="748822"/>
+                    <a:pt x="1283369" y="770021"/>
+                  </a:cubicBezTo>
+                  <a:cubicBezTo>
+                    <a:pt x="1288015" y="786280"/>
+                    <a:pt x="1294765" y="801889"/>
+                    <a:pt x="1299411" y="818148"/>
+                  </a:cubicBezTo>
+                  <a:cubicBezTo>
+                    <a:pt x="1308135" y="848682"/>
+                    <a:pt x="1332289" y="963321"/>
+                    <a:pt x="1347537" y="978569"/>
+                  </a:cubicBezTo>
+                  <a:lnTo>
+                    <a:pt x="1379622" y="1010653"/>
+                  </a:lnTo>
+                  <a:cubicBezTo>
+                    <a:pt x="1390317" y="1042737"/>
+                    <a:pt x="1392946" y="1078766"/>
+                    <a:pt x="1411706" y="1106906"/>
+                  </a:cubicBezTo>
+                  <a:cubicBezTo>
+                    <a:pt x="1422401" y="1122948"/>
+                    <a:pt x="1435168" y="1137787"/>
+                    <a:pt x="1443790" y="1155032"/>
+                  </a:cubicBezTo>
+                  <a:cubicBezTo>
+                    <a:pt x="1451352" y="1170157"/>
+                    <a:pt x="1449686" y="1189630"/>
+                    <a:pt x="1459832" y="1203158"/>
+                  </a:cubicBezTo>
+                  <a:cubicBezTo>
+                    <a:pt x="1482519" y="1233407"/>
+                    <a:pt x="1519069" y="1251908"/>
+                    <a:pt x="1540043" y="1283369"/>
+                  </a:cubicBezTo>
+                  <a:cubicBezTo>
+                    <a:pt x="1569313" y="1327274"/>
+                    <a:pt x="1569594" y="1341064"/>
+                    <a:pt x="1620253" y="1363579"/>
+                  </a:cubicBezTo>
+                  <a:cubicBezTo>
+                    <a:pt x="1620260" y="1363582"/>
+                    <a:pt x="1740565" y="1403684"/>
+                    <a:pt x="1764632" y="1411706"/>
+                  </a:cubicBezTo>
+                  <a:cubicBezTo>
+                    <a:pt x="1819932" y="1430139"/>
+                    <a:pt x="1800801" y="1415791"/>
+                    <a:pt x="1828800" y="1443790"/>
+                  </a:cubicBezTo>
+                </a:path>
+              </a:pathLst>
+            </a:custGeom>
+            <a:noFill/>
+            <a:ln w="50800">
+              <a:solidFill>
+                <a:schemeClr val="accent2"/>
+              </a:solidFill>
+            </a:ln>
+          </p:spPr>
+          <p:style>
+            <a:lnRef idx="2">
+              <a:schemeClr val="accent1">
+                <a:shade val="50000"/>
+              </a:schemeClr>
+            </a:lnRef>
+            <a:fillRef idx="1">
+              <a:schemeClr val="accent1"/>
+            </a:fillRef>
+            <a:effectRef idx="0">
+              <a:schemeClr val="accent1"/>
+            </a:effectRef>
+            <a:fontRef idx="minor">
+              <a:schemeClr val="lt1"/>
+            </a:fontRef>
+          </p:style>
+          <p:txBody>
+            <a:bodyPr rtlCol="0" anchor="ctr"/>
+            <a:lstStyle/>
+            <a:p>
+              <a:pPr algn="ctr"/>
+              <a:endParaRPr lang="en-US"/>
+            </a:p>
+          </p:txBody>
+        </p:sp>
+        <p:sp>
+          <p:nvSpPr>
+            <p:cNvPr id="20" name="Freeform 19">
+              <a:extLst>
+                <a:ext uri="{FF2B5EF4-FFF2-40B4-BE49-F238E27FC236}">
+                  <a16:creationId xmlns:a16="http://schemas.microsoft.com/office/drawing/2014/main" id="{1D4078CB-F8B3-D540-9B24-AC87E5FD8361}"/>
+                </a:ext>
+              </a:extLst>
+            </p:cNvPr>
+            <p:cNvSpPr/>
+            <p:nvPr/>
+          </p:nvSpPr>
+          <p:spPr>
+            <a:xfrm>
+              <a:off x="1937961" y="4535701"/>
+              <a:ext cx="323238" cy="1443790"/>
+            </a:xfrm>
+            <a:custGeom>
+              <a:avLst/>
+              <a:gdLst>
+                <a:gd name="connsiteX0" fmla="*/ 0 w 1828800"/>
+                <a:gd name="connsiteY0" fmla="*/ 1443790 h 1443790"/>
+                <a:gd name="connsiteX1" fmla="*/ 112295 w 1828800"/>
+                <a:gd name="connsiteY1" fmla="*/ 1411706 h 1443790"/>
+                <a:gd name="connsiteX2" fmla="*/ 160422 w 1828800"/>
+                <a:gd name="connsiteY2" fmla="*/ 1395664 h 1443790"/>
+                <a:gd name="connsiteX3" fmla="*/ 256674 w 1828800"/>
+                <a:gd name="connsiteY3" fmla="*/ 1347537 h 1443790"/>
+                <a:gd name="connsiteX4" fmla="*/ 320843 w 1828800"/>
+                <a:gd name="connsiteY4" fmla="*/ 1251285 h 1443790"/>
+                <a:gd name="connsiteX5" fmla="*/ 352927 w 1828800"/>
+                <a:gd name="connsiteY5" fmla="*/ 1219200 h 1443790"/>
+                <a:gd name="connsiteX6" fmla="*/ 417095 w 1828800"/>
+                <a:gd name="connsiteY6" fmla="*/ 1122948 h 1443790"/>
+                <a:gd name="connsiteX7" fmla="*/ 449179 w 1828800"/>
+                <a:gd name="connsiteY7" fmla="*/ 1074821 h 1443790"/>
+                <a:gd name="connsiteX8" fmla="*/ 497306 w 1828800"/>
+                <a:gd name="connsiteY8" fmla="*/ 978569 h 1443790"/>
+                <a:gd name="connsiteX9" fmla="*/ 561474 w 1828800"/>
+                <a:gd name="connsiteY9" fmla="*/ 866274 h 1443790"/>
+                <a:gd name="connsiteX10" fmla="*/ 609600 w 1828800"/>
+                <a:gd name="connsiteY10" fmla="*/ 705853 h 1443790"/>
+                <a:gd name="connsiteX11" fmla="*/ 625643 w 1828800"/>
+                <a:gd name="connsiteY11" fmla="*/ 657727 h 1443790"/>
+                <a:gd name="connsiteX12" fmla="*/ 657727 w 1828800"/>
+                <a:gd name="connsiteY12" fmla="*/ 625642 h 1443790"/>
+                <a:gd name="connsiteX13" fmla="*/ 689811 w 1828800"/>
+                <a:gd name="connsiteY13" fmla="*/ 465221 h 1443790"/>
+                <a:gd name="connsiteX14" fmla="*/ 721895 w 1828800"/>
+                <a:gd name="connsiteY14" fmla="*/ 368969 h 1443790"/>
+                <a:gd name="connsiteX15" fmla="*/ 737937 w 1828800"/>
+                <a:gd name="connsiteY15" fmla="*/ 320842 h 1443790"/>
+                <a:gd name="connsiteX16" fmla="*/ 770022 w 1828800"/>
+                <a:gd name="connsiteY16" fmla="*/ 224590 h 1443790"/>
+                <a:gd name="connsiteX17" fmla="*/ 834190 w 1828800"/>
+                <a:gd name="connsiteY17" fmla="*/ 128337 h 1443790"/>
+                <a:gd name="connsiteX18" fmla="*/ 850232 w 1828800"/>
+                <a:gd name="connsiteY18" fmla="*/ 80211 h 1443790"/>
+                <a:gd name="connsiteX19" fmla="*/ 914400 w 1828800"/>
+                <a:gd name="connsiteY19" fmla="*/ 0 h 1443790"/>
+                <a:gd name="connsiteX20" fmla="*/ 1026695 w 1828800"/>
+                <a:gd name="connsiteY20" fmla="*/ 16042 h 1443790"/>
+                <a:gd name="connsiteX21" fmla="*/ 1058779 w 1828800"/>
+                <a:gd name="connsiteY21" fmla="*/ 112295 h 1443790"/>
+                <a:gd name="connsiteX22" fmla="*/ 1106906 w 1828800"/>
+                <a:gd name="connsiteY22" fmla="*/ 256674 h 1443790"/>
+                <a:gd name="connsiteX23" fmla="*/ 1122948 w 1828800"/>
+                <a:gd name="connsiteY23" fmla="*/ 304800 h 1443790"/>
+                <a:gd name="connsiteX24" fmla="*/ 1155032 w 1828800"/>
+                <a:gd name="connsiteY24" fmla="*/ 336885 h 1443790"/>
+                <a:gd name="connsiteX25" fmla="*/ 1203158 w 1828800"/>
+                <a:gd name="connsiteY25" fmla="*/ 481264 h 1443790"/>
+                <a:gd name="connsiteX26" fmla="*/ 1219200 w 1828800"/>
+                <a:gd name="connsiteY26" fmla="*/ 529390 h 1443790"/>
+                <a:gd name="connsiteX27" fmla="*/ 1251285 w 1828800"/>
+                <a:gd name="connsiteY27" fmla="*/ 657727 h 1443790"/>
+                <a:gd name="connsiteX28" fmla="*/ 1267327 w 1828800"/>
+                <a:gd name="connsiteY28" fmla="*/ 705853 h 1443790"/>
+                <a:gd name="connsiteX29" fmla="*/ 1283369 w 1828800"/>
+                <a:gd name="connsiteY29" fmla="*/ 770021 h 1443790"/>
+                <a:gd name="connsiteX30" fmla="*/ 1299411 w 1828800"/>
+                <a:gd name="connsiteY30" fmla="*/ 818148 h 1443790"/>
+                <a:gd name="connsiteX31" fmla="*/ 1347537 w 1828800"/>
+                <a:gd name="connsiteY31" fmla="*/ 978569 h 1443790"/>
+                <a:gd name="connsiteX32" fmla="*/ 1379622 w 1828800"/>
+                <a:gd name="connsiteY32" fmla="*/ 1010653 h 1443790"/>
+                <a:gd name="connsiteX33" fmla="*/ 1411706 w 1828800"/>
+                <a:gd name="connsiteY33" fmla="*/ 1106906 h 1443790"/>
+                <a:gd name="connsiteX34" fmla="*/ 1443790 w 1828800"/>
+                <a:gd name="connsiteY34" fmla="*/ 1155032 h 1443790"/>
+                <a:gd name="connsiteX35" fmla="*/ 1459832 w 1828800"/>
+                <a:gd name="connsiteY35" fmla="*/ 1203158 h 1443790"/>
+                <a:gd name="connsiteX36" fmla="*/ 1540043 w 1828800"/>
+                <a:gd name="connsiteY36" fmla="*/ 1283369 h 1443790"/>
+                <a:gd name="connsiteX37" fmla="*/ 1620253 w 1828800"/>
+                <a:gd name="connsiteY37" fmla="*/ 1363579 h 1443790"/>
+                <a:gd name="connsiteX38" fmla="*/ 1764632 w 1828800"/>
+                <a:gd name="connsiteY38" fmla="*/ 1411706 h 1443790"/>
+                <a:gd name="connsiteX39" fmla="*/ 1828800 w 1828800"/>
+                <a:gd name="connsiteY39" fmla="*/ 1443790 h 1443790"/>
+              </a:gdLst>
+              <a:ahLst/>
+              <a:cxnLst>
+                <a:cxn ang="0">
+                  <a:pos x="connsiteX0" y="connsiteY0"/>
+                </a:cxn>
+                <a:cxn ang="0">
+                  <a:pos x="connsiteX1" y="connsiteY1"/>
+                </a:cxn>
+                <a:cxn ang="0">
+                  <a:pos x="connsiteX2" y="connsiteY2"/>
+                </a:cxn>
+                <a:cxn ang="0">
+                  <a:pos x="connsiteX3" y="connsiteY3"/>
+                </a:cxn>
+                <a:cxn ang="0">
+                  <a:pos x="connsiteX4" y="connsiteY4"/>
+                </a:cxn>
+                <a:cxn ang="0">
+                  <a:pos x="connsiteX5" y="connsiteY5"/>
+                </a:cxn>
+                <a:cxn ang="0">
+                  <a:pos x="connsiteX6" y="connsiteY6"/>
+                </a:cxn>
+                <a:cxn ang="0">
+                  <a:pos x="connsiteX7" y="connsiteY7"/>
+                </a:cxn>
+                <a:cxn ang="0">
+                  <a:pos x="connsiteX8" y="connsiteY8"/>
+                </a:cxn>
+                <a:cxn ang="0">
+                  <a:pos x="connsiteX9" y="connsiteY9"/>
+                </a:cxn>
+                <a:cxn ang="0">
+                  <a:pos x="connsiteX10" y="connsiteY10"/>
+                </a:cxn>
+                <a:cxn ang="0">
+                  <a:pos x="connsiteX11" y="connsiteY11"/>
+                </a:cxn>
+                <a:cxn ang="0">
+                  <a:pos x="connsiteX12" y="connsiteY12"/>
+                </a:cxn>
+                <a:cxn ang="0">
+                  <a:pos x="connsiteX13" y="connsiteY13"/>
+                </a:cxn>
+                <a:cxn ang="0">
+                  <a:pos x="connsiteX14" y="connsiteY14"/>
+                </a:cxn>
+                <a:cxn ang="0">
+                  <a:pos x="connsiteX15" y="connsiteY15"/>
+                </a:cxn>
+                <a:cxn ang="0">
+                  <a:pos x="connsiteX16" y="connsiteY16"/>
+                </a:cxn>
+                <a:cxn ang="0">
+                  <a:pos x="connsiteX17" y="connsiteY17"/>
+                </a:cxn>
+                <a:cxn ang="0">
+                  <a:pos x="connsiteX18" y="connsiteY18"/>
+                </a:cxn>
+                <a:cxn ang="0">
+                  <a:pos x="connsiteX19" y="connsiteY19"/>
+                </a:cxn>
+                <a:cxn ang="0">
+                  <a:pos x="connsiteX20" y="connsiteY20"/>
+                </a:cxn>
+                <a:cxn ang="0">
+                  <a:pos x="connsiteX21" y="connsiteY21"/>
+                </a:cxn>
+                <a:cxn ang="0">
+                  <a:pos x="connsiteX22" y="connsiteY22"/>
+                </a:cxn>
+                <a:cxn ang="0">
+                  <a:pos x="connsiteX23" y="connsiteY23"/>
+                </a:cxn>
+                <a:cxn ang="0">
+                  <a:pos x="connsiteX24" y="connsiteY24"/>
+                </a:cxn>
+                <a:cxn ang="0">
+                  <a:pos x="connsiteX25" y="connsiteY25"/>
+                </a:cxn>
+                <a:cxn ang="0">
+                  <a:pos x="connsiteX26" y="connsiteY26"/>
+                </a:cxn>
+                <a:cxn ang="0">
+                  <a:pos x="connsiteX27" y="connsiteY27"/>
+                </a:cxn>
+                <a:cxn ang="0">
+                  <a:pos x="connsiteX28" y="connsiteY28"/>
+                </a:cxn>
+                <a:cxn ang="0">
+                  <a:pos x="connsiteX29" y="connsiteY29"/>
+                </a:cxn>
+                <a:cxn ang="0">
+                  <a:pos x="connsiteX30" y="connsiteY30"/>
+                </a:cxn>
+                <a:cxn ang="0">
+                  <a:pos x="connsiteX31" y="connsiteY31"/>
+                </a:cxn>
+                <a:cxn ang="0">
+                  <a:pos x="connsiteX32" y="connsiteY32"/>
+                </a:cxn>
+                <a:cxn ang="0">
+                  <a:pos x="connsiteX33" y="connsiteY33"/>
+                </a:cxn>
+                <a:cxn ang="0">
+                  <a:pos x="connsiteX34" y="connsiteY34"/>
+                </a:cxn>
+                <a:cxn ang="0">
+                  <a:pos x="connsiteX35" y="connsiteY35"/>
+                </a:cxn>
+                <a:cxn ang="0">
+                  <a:pos x="connsiteX36" y="connsiteY36"/>
+                </a:cxn>
+                <a:cxn ang="0">
+                  <a:pos x="connsiteX37" y="connsiteY37"/>
+                </a:cxn>
+                <a:cxn ang="0">
+                  <a:pos x="connsiteX38" y="connsiteY38"/>
+                </a:cxn>
+                <a:cxn ang="0">
+                  <a:pos x="connsiteX39" y="connsiteY39"/>
+                </a:cxn>
+              </a:cxnLst>
+              <a:rect l="l" t="t" r="r" b="b"/>
+              <a:pathLst>
+                <a:path w="1828800" h="1443790">
+                  <a:moveTo>
+                    <a:pt x="0" y="1443790"/>
+                  </a:moveTo>
+                  <a:lnTo>
+                    <a:pt x="112295" y="1411706"/>
+                  </a:lnTo>
+                  <a:cubicBezTo>
+                    <a:pt x="128492" y="1406847"/>
+                    <a:pt x="145297" y="1403226"/>
+                    <a:pt x="160422" y="1395664"/>
+                  </a:cubicBezTo>
+                  <a:cubicBezTo>
+                    <a:pt x="284817" y="1333466"/>
+                    <a:pt x="135705" y="1387860"/>
+                    <a:pt x="256674" y="1347537"/>
+                  </a:cubicBezTo>
+                  <a:cubicBezTo>
+                    <a:pt x="278064" y="1315453"/>
+                    <a:pt x="293577" y="1278552"/>
+                    <a:pt x="320843" y="1251285"/>
+                  </a:cubicBezTo>
+                  <a:cubicBezTo>
+                    <a:pt x="331538" y="1240590"/>
+                    <a:pt x="343852" y="1231300"/>
+                    <a:pt x="352927" y="1219200"/>
+                  </a:cubicBezTo>
+                  <a:cubicBezTo>
+                    <a:pt x="376063" y="1188352"/>
+                    <a:pt x="395706" y="1155032"/>
+                    <a:pt x="417095" y="1122948"/>
+                  </a:cubicBezTo>
+                  <a:cubicBezTo>
+                    <a:pt x="427790" y="1106906"/>
+                    <a:pt x="443082" y="1093112"/>
+                    <a:pt x="449179" y="1074821"/>
+                  </a:cubicBezTo>
+                  <a:cubicBezTo>
+                    <a:pt x="478594" y="986581"/>
+                    <a:pt x="447547" y="1065647"/>
+                    <a:pt x="497306" y="978569"/>
+                  </a:cubicBezTo>
+                  <a:cubicBezTo>
+                    <a:pt x="578718" y="836096"/>
+                    <a:pt x="483307" y="983525"/>
+                    <a:pt x="561474" y="866274"/>
+                  </a:cubicBezTo>
+                  <a:cubicBezTo>
+                    <a:pt x="585717" y="769303"/>
+                    <a:pt x="570547" y="823011"/>
+                    <a:pt x="609600" y="705853"/>
+                  </a:cubicBezTo>
+                  <a:cubicBezTo>
+                    <a:pt x="614947" y="689811"/>
+                    <a:pt x="613686" y="669684"/>
+                    <a:pt x="625643" y="657727"/>
+                  </a:cubicBezTo>
+                  <a:lnTo>
+                    <a:pt x="657727" y="625642"/>
+                  </a:lnTo>
+                  <a:cubicBezTo>
+                    <a:pt x="668567" y="560602"/>
+                    <a:pt x="671863" y="525047"/>
+                    <a:pt x="689811" y="465221"/>
+                  </a:cubicBezTo>
+                  <a:cubicBezTo>
+                    <a:pt x="699529" y="432828"/>
+                    <a:pt x="711200" y="401053"/>
+                    <a:pt x="721895" y="368969"/>
+                  </a:cubicBezTo>
+                  <a:lnTo>
+                    <a:pt x="737937" y="320842"/>
+                  </a:lnTo>
+                  <a:cubicBezTo>
+                    <a:pt x="737939" y="320837"/>
+                    <a:pt x="770019" y="224594"/>
+                    <a:pt x="770022" y="224590"/>
+                  </a:cubicBezTo>
+                  <a:cubicBezTo>
+                    <a:pt x="791411" y="192506"/>
+                    <a:pt x="821996" y="164919"/>
+                    <a:pt x="834190" y="128337"/>
+                  </a:cubicBezTo>
+                  <a:cubicBezTo>
+                    <a:pt x="839537" y="112295"/>
+                    <a:pt x="842670" y="95336"/>
+                    <a:pt x="850232" y="80211"/>
+                  </a:cubicBezTo>
+                  <a:cubicBezTo>
+                    <a:pt x="870468" y="39739"/>
+                    <a:pt x="884559" y="29842"/>
+                    <a:pt x="914400" y="0"/>
+                  </a:cubicBezTo>
+                  <a:cubicBezTo>
+                    <a:pt x="951832" y="5347"/>
+                    <a:pt x="996848" y="-7172"/>
+                    <a:pt x="1026695" y="16042"/>
+                  </a:cubicBezTo>
+                  <a:cubicBezTo>
+                    <a:pt x="1053391" y="36805"/>
+                    <a:pt x="1048084" y="80211"/>
+                    <a:pt x="1058779" y="112295"/>
+                  </a:cubicBezTo>
+                  <a:lnTo>
+                    <a:pt x="1106906" y="256674"/>
+                  </a:lnTo>
+                  <a:cubicBezTo>
+                    <a:pt x="1112253" y="272716"/>
+                    <a:pt x="1110991" y="292843"/>
+                    <a:pt x="1122948" y="304800"/>
+                  </a:cubicBezTo>
+                  <a:lnTo>
+                    <a:pt x="1155032" y="336885"/>
+                  </a:lnTo>
+                  <a:lnTo>
+                    <a:pt x="1203158" y="481264"/>
+                  </a:lnTo>
+                  <a:cubicBezTo>
+                    <a:pt x="1208505" y="497306"/>
+                    <a:pt x="1215099" y="512985"/>
+                    <a:pt x="1219200" y="529390"/>
+                  </a:cubicBezTo>
+                  <a:cubicBezTo>
+                    <a:pt x="1229895" y="572169"/>
+                    <a:pt x="1237341" y="615894"/>
+                    <a:pt x="1251285" y="657727"/>
+                  </a:cubicBezTo>
+                  <a:cubicBezTo>
+                    <a:pt x="1256632" y="673769"/>
+                    <a:pt x="1262682" y="689594"/>
+                    <a:pt x="1267327" y="705853"/>
+                  </a:cubicBezTo>
+                  <a:cubicBezTo>
+                    <a:pt x="1273384" y="727052"/>
+                    <a:pt x="1277312" y="748822"/>
+                    <a:pt x="1283369" y="770021"/>
+                  </a:cubicBezTo>
+                  <a:cubicBezTo>
+                    <a:pt x="1288015" y="786280"/>
+                    <a:pt x="1294765" y="801889"/>
+                    <a:pt x="1299411" y="818148"/>
+                  </a:cubicBezTo>
+                  <a:cubicBezTo>
+                    <a:pt x="1308135" y="848682"/>
+                    <a:pt x="1332289" y="963321"/>
+                    <a:pt x="1347537" y="978569"/>
+                  </a:cubicBezTo>
+                  <a:lnTo>
+                    <a:pt x="1379622" y="1010653"/>
+                  </a:lnTo>
+                  <a:cubicBezTo>
+                    <a:pt x="1390317" y="1042737"/>
+                    <a:pt x="1392946" y="1078766"/>
+                    <a:pt x="1411706" y="1106906"/>
+                  </a:cubicBezTo>
+                  <a:cubicBezTo>
+                    <a:pt x="1422401" y="1122948"/>
+                    <a:pt x="1435168" y="1137787"/>
+                    <a:pt x="1443790" y="1155032"/>
+                  </a:cubicBezTo>
+                  <a:cubicBezTo>
+                    <a:pt x="1451352" y="1170157"/>
+                    <a:pt x="1449686" y="1189630"/>
+                    <a:pt x="1459832" y="1203158"/>
+                  </a:cubicBezTo>
+                  <a:cubicBezTo>
+                    <a:pt x="1482519" y="1233407"/>
+                    <a:pt x="1519069" y="1251908"/>
+                    <a:pt x="1540043" y="1283369"/>
+                  </a:cubicBezTo>
+                  <a:cubicBezTo>
+                    <a:pt x="1569313" y="1327274"/>
+                    <a:pt x="1569594" y="1341064"/>
+                    <a:pt x="1620253" y="1363579"/>
+                  </a:cubicBezTo>
+                  <a:cubicBezTo>
+                    <a:pt x="1620260" y="1363582"/>
+                    <a:pt x="1740565" y="1403684"/>
+                    <a:pt x="1764632" y="1411706"/>
+                  </a:cubicBezTo>
+                  <a:cubicBezTo>
+                    <a:pt x="1819932" y="1430139"/>
+                    <a:pt x="1800801" y="1415791"/>
+                    <a:pt x="1828800" y="1443790"/>
+                  </a:cubicBezTo>
+                </a:path>
+              </a:pathLst>
+            </a:custGeom>
+            <a:noFill/>
+            <a:ln w="50800">
+              <a:solidFill>
+                <a:schemeClr val="accent2"/>
+              </a:solidFill>
+            </a:ln>
+          </p:spPr>
+          <p:style>
+            <a:lnRef idx="2">
+              <a:schemeClr val="accent1">
+                <a:shade val="50000"/>
+              </a:schemeClr>
+            </a:lnRef>
+            <a:fillRef idx="1">
+              <a:schemeClr val="accent1"/>
+            </a:fillRef>
+            <a:effectRef idx="0">
+              <a:schemeClr val="accent1"/>
+            </a:effectRef>
+            <a:fontRef idx="minor">
+              <a:schemeClr val="lt1"/>
+            </a:fontRef>
+          </p:style>
+          <p:txBody>
+            <a:bodyPr rtlCol="0" anchor="ctr"/>
+            <a:lstStyle/>
+            <a:p>
+              <a:pPr algn="ctr"/>
+              <a:endParaRPr lang="en-US"/>
+            </a:p>
+          </p:txBody>
+        </p:sp>
+      </p:grpSp>
+      <p:sp>
+        <p:nvSpPr>
+          <p:cNvPr id="15" name="TextBox 14">
+            <a:extLst>
+              <a:ext uri="{FF2B5EF4-FFF2-40B4-BE49-F238E27FC236}">
+                <a16:creationId xmlns:a16="http://schemas.microsoft.com/office/drawing/2014/main" id="{060CD50A-6481-7B45-ACBD-AA9F1714A205}"/>
+              </a:ext>
+            </a:extLst>
+          </p:cNvPr>
+          <p:cNvSpPr txBox="1"/>
+          <p:nvPr/>
+        </p:nvSpPr>
+        <p:spPr>
+          <a:xfrm>
+            <a:off x="4072612" y="4789629"/>
+            <a:ext cx="949490" cy="738664"/>
+          </a:xfrm>
+          <a:prstGeom prst="rect">
+            <a:avLst/>
+          </a:prstGeom>
+          <a:noFill/>
+        </p:spPr>
+        <p:txBody>
+          <a:bodyPr wrap="square" rtlCol="0">
+            <a:spAutoFit/>
+          </a:bodyPr>
+          <a:lstStyle/>
+          <a:p>
+            <a:pPr algn="ctr"/>
+            <a:r>
+              <a:rPr lang="en-US" sz="1400" dirty="0"/>
+              <a:t>Standard </a:t>
+            </a:r>
+          </a:p>
+          <a:p>
+            <a:pPr algn="ctr"/>
+            <a:r>
+              <a:rPr lang="en-US" sz="1400" dirty="0"/>
+              <a:t>Deviation</a:t>
+            </a:r>
+          </a:p>
+          <a:p>
+            <a:pPr algn="ctr"/>
+            <a:r>
+              <a:rPr lang="en-US" sz="1400" dirty="0"/>
+              <a:t>(blue)</a:t>
+            </a:r>
+          </a:p>
+        </p:txBody>
+      </p:sp>
+      <p:sp>
+        <p:nvSpPr>
+          <p:cNvPr id="23" name="TextBox 22">
+            <a:extLst>
+              <a:ext uri="{FF2B5EF4-FFF2-40B4-BE49-F238E27FC236}">
+                <a16:creationId xmlns:a16="http://schemas.microsoft.com/office/drawing/2014/main" id="{F2738075-2F24-A543-967A-97BA8A260259}"/>
+              </a:ext>
+            </a:extLst>
+          </p:cNvPr>
+          <p:cNvSpPr txBox="1"/>
+          <p:nvPr/>
+        </p:nvSpPr>
+        <p:spPr>
+          <a:xfrm>
+            <a:off x="5795738" y="5650859"/>
+            <a:ext cx="1276190" cy="738664"/>
+          </a:xfrm>
+          <a:prstGeom prst="rect">
+            <a:avLst/>
+          </a:prstGeom>
+          <a:noFill/>
+        </p:spPr>
+        <p:txBody>
+          <a:bodyPr wrap="square" rtlCol="0">
+            <a:spAutoFit/>
+          </a:bodyPr>
+          <a:lstStyle/>
+          <a:p>
+            <a:pPr algn="ctr"/>
+            <a:r>
+              <a:rPr lang="en-US" sz="1400" dirty="0"/>
+              <a:t>Standard Error of the Mean</a:t>
+            </a:r>
+          </a:p>
+          <a:p>
+            <a:pPr algn="ctr"/>
+            <a:r>
+              <a:rPr lang="en-US" sz="1400" dirty="0"/>
+              <a:t>(orange)</a:t>
+            </a:r>
+          </a:p>
+        </p:txBody>
+      </p:sp>
+      <p:sp>
+        <p:nvSpPr>
+          <p:cNvPr id="16" name="Down Arrow 15">
+            <a:extLst>
+              <a:ext uri="{FF2B5EF4-FFF2-40B4-BE49-F238E27FC236}">
+                <a16:creationId xmlns:a16="http://schemas.microsoft.com/office/drawing/2014/main" id="{921B67D6-B1DA-D04B-801F-0945046F59CE}"/>
+              </a:ext>
+            </a:extLst>
+          </p:cNvPr>
+          <p:cNvSpPr/>
+          <p:nvPr/>
+        </p:nvSpPr>
+        <p:spPr>
+          <a:xfrm rot="9442603">
+            <a:off x="6127921" y="5168133"/>
+            <a:ext cx="141171" cy="467360"/>
+          </a:xfrm>
+          <a:prstGeom prst="downArrow">
+            <a:avLst/>
+          </a:prstGeom>
+          <a:solidFill>
+            <a:schemeClr val="accent6"/>
+          </a:solidFill>
+        </p:spPr>
+        <p:style>
+          <a:lnRef idx="2">
+            <a:schemeClr val="accent1">
+              <a:shade val="50000"/>
+            </a:schemeClr>
+          </a:lnRef>
+          <a:fillRef idx="1">
+            <a:schemeClr val="accent1"/>
+          </a:fillRef>
+          <a:effectRef idx="0">
+            <a:schemeClr val="accent1"/>
+          </a:effectRef>
+          <a:fontRef idx="minor">
+            <a:schemeClr val="lt1"/>
+          </a:fontRef>
+        </p:style>
+        <p:txBody>
+          <a:bodyPr rtlCol="0" anchor="ctr"/>
+          <a:lstStyle/>
+          <a:p>
+            <a:pPr algn="ctr"/>
+            <a:endParaRPr lang="en-US" dirty="0"/>
+          </a:p>
+        </p:txBody>
+      </p:sp>
+      <p:sp>
+        <p:nvSpPr>
+          <p:cNvPr id="25" name="Down Arrow 24">
+            <a:extLst>
+              <a:ext uri="{FF2B5EF4-FFF2-40B4-BE49-F238E27FC236}">
+                <a16:creationId xmlns:a16="http://schemas.microsoft.com/office/drawing/2014/main" id="{FB7EE3FC-D668-8A4B-89A3-C3E87EDE8295}"/>
+              </a:ext>
+            </a:extLst>
+          </p:cNvPr>
+          <p:cNvSpPr/>
+          <p:nvPr/>
+        </p:nvSpPr>
+        <p:spPr>
+          <a:xfrm rot="11812451">
+            <a:off x="6374957" y="5159463"/>
+            <a:ext cx="141171" cy="467360"/>
+          </a:xfrm>
+          <a:prstGeom prst="downArrow">
+            <a:avLst/>
+          </a:prstGeom>
+          <a:solidFill>
+            <a:schemeClr val="accent6"/>
+          </a:solidFill>
+        </p:spPr>
+        <p:style>
+          <a:lnRef idx="2">
+            <a:schemeClr val="accent1">
+              <a:shade val="50000"/>
+            </a:schemeClr>
+          </a:lnRef>
+          <a:fillRef idx="1">
+            <a:schemeClr val="accent1"/>
+          </a:fillRef>
+          <a:effectRef idx="0">
+            <a:schemeClr val="accent1"/>
+          </a:effectRef>
+          <a:fontRef idx="minor">
+            <a:schemeClr val="lt1"/>
+          </a:fontRef>
+        </p:style>
+        <p:txBody>
+          <a:bodyPr rtlCol="0" anchor="ctr"/>
+          <a:lstStyle/>
+          <a:p>
+            <a:pPr algn="ctr"/>
+            <a:endParaRPr lang="en-US" dirty="0"/>
+          </a:p>
+        </p:txBody>
+      </p:sp>
+      <p:sp>
+        <p:nvSpPr>
+          <p:cNvPr id="17" name="TextBox 16">
+            <a:extLst>
+              <a:ext uri="{FF2B5EF4-FFF2-40B4-BE49-F238E27FC236}">
+                <a16:creationId xmlns:a16="http://schemas.microsoft.com/office/drawing/2014/main" id="{7CE44D64-A743-1048-970B-E7F5E970E491}"/>
+              </a:ext>
+            </a:extLst>
+          </p:cNvPr>
+          <p:cNvSpPr txBox="1"/>
+          <p:nvPr/>
+        </p:nvSpPr>
+        <p:spPr>
+          <a:xfrm>
+            <a:off x="5663189" y="3055269"/>
+            <a:ext cx="1462186" cy="584775"/>
+          </a:xfrm>
+          <a:prstGeom prst="rect">
+            <a:avLst/>
+          </a:prstGeom>
+          <a:noFill/>
+        </p:spPr>
+        <p:txBody>
+          <a:bodyPr wrap="square" rtlCol="0">
+            <a:spAutoFit/>
+          </a:bodyPr>
+          <a:lstStyle/>
+          <a:p>
+            <a:r>
+              <a:rPr lang="en-US" sz="3200" b="1" dirty="0">
+                <a:solidFill>
+                  <a:srgbClr val="FF0000"/>
+                </a:solidFill>
+              </a:rPr>
+              <a:t> A   B</a:t>
+            </a:r>
+          </a:p>
+        </p:txBody>
+      </p:sp>
+    </p:spTree>
+    <p:extLst>
+      <p:ext uri="{BB962C8B-B14F-4D97-AF65-F5344CB8AC3E}">
+        <p14:creationId xmlns:p14="http://schemas.microsoft.com/office/powerpoint/2010/main" val="242201921"/>
       </p:ext>
     </p:extLst>
   </p:cSld>
